--- a/Outils et Materiels/Cartes éclair sur le RAID.pptx
+++ b/Outils et Materiels/Cartes éclair sur le RAID.pptx
@@ -6,11 +6,14 @@
   </p:sldMasterIdLst>
   <p:sldIdLst>
     <p:sldId id="256" r:id="rId2"/>
-    <p:sldId id="258" r:id="rId3"/>
-    <p:sldId id="259" r:id="rId4"/>
-    <p:sldId id="260" r:id="rId5"/>
-    <p:sldId id="261" r:id="rId6"/>
-    <p:sldId id="262" r:id="rId7"/>
+    <p:sldId id="264" r:id="rId3"/>
+    <p:sldId id="258" r:id="rId4"/>
+    <p:sldId id="265" r:id="rId5"/>
+    <p:sldId id="266" r:id="rId6"/>
+    <p:sldId id="260" r:id="rId7"/>
+    <p:sldId id="261" r:id="rId8"/>
+    <p:sldId id="262" r:id="rId9"/>
+    <p:sldId id="263" r:id="rId10"/>
   </p:sldIdLst>
   <p:sldSz cx="12192000" cy="6858000"/>
   <p:notesSz cx="6858000" cy="9144000"/>
@@ -109,6 +112,11 @@
       </a:defRPr>
     </a:lvl9pPr>
   </p:defaultTextStyle>
+  <p:extLst>
+    <p:ext uri="{EFAFB233-063F-42B5-8137-9DF3F51BA10A}">
+      <p15:sldGuideLst xmlns:p15="http://schemas.microsoft.com/office/powerpoint/2012/main"/>
+    </p:ext>
+  </p:extLst>
 </p:presentation>
 </file>
 
@@ -367,7 +375,7 @@
           <a:p>
             <a:fld id="{148CC95F-0247-41B6-91CF-DC97C76A7088}" type="slidenum">
               <a:rPr lang="en-US" smtClean="0"/>
-              <a:t>‹#›</a:t>
+              <a:t>‹n°›</a:t>
             </a:fld>
             <a:endParaRPr lang="en-US"/>
           </a:p>
@@ -660,7 +668,7 @@
             <a:fld id="{148CC95F-0247-41B6-91CF-DC97C76A7088}" type="slidenum">
               <a:rPr lang="en-US" smtClean="0"/>
               <a:pPr/>
-              <a:t>‹#›</a:t>
+              <a:t>‹n°›</a:t>
             </a:fld>
             <a:endParaRPr lang="en-US"/>
           </a:p>
@@ -921,7 +929,7 @@
             <a:fld id="{148CC95F-0247-41B6-91CF-DC97C76A7088}" type="slidenum">
               <a:rPr lang="en-US" smtClean="0"/>
               <a:pPr/>
-              <a:t>‹#›</a:t>
+              <a:t>‹n°›</a:t>
             </a:fld>
             <a:endParaRPr lang="en-US"/>
           </a:p>
@@ -1392,7 +1400,7 @@
             <a:fld id="{148CC95F-0247-41B6-91CF-DC97C76A7088}" type="slidenum">
               <a:rPr lang="en-US" smtClean="0"/>
               <a:pPr/>
-              <a:t>‹#›</a:t>
+              <a:t>‹n°›</a:t>
             </a:fld>
             <a:endParaRPr lang="en-US"/>
           </a:p>
@@ -1574,7 +1582,7 @@
             <a:fld id="{148CC95F-0247-41B6-91CF-DC97C76A7088}" type="slidenum">
               <a:rPr lang="en-US" smtClean="0"/>
               <a:pPr/>
-              <a:t>‹#›</a:t>
+              <a:t>‹n°›</a:t>
             </a:fld>
             <a:endParaRPr lang="en-US"/>
           </a:p>
@@ -2152,7 +2160,7 @@
             <a:fld id="{148CC95F-0247-41B6-91CF-DC97C76A7088}" type="slidenum">
               <a:rPr lang="en-US" smtClean="0"/>
               <a:pPr/>
-              <a:t>‹#›</a:t>
+              <a:t>‹n°›</a:t>
             </a:fld>
             <a:endParaRPr lang="en-US"/>
           </a:p>
@@ -2486,7 +2494,7 @@
             <a:fld id="{148CC95F-0247-41B6-91CF-DC97C76A7088}" type="slidenum">
               <a:rPr lang="en-US" smtClean="0"/>
               <a:pPr/>
-              <a:t>‹#›</a:t>
+              <a:t>‹n°›</a:t>
             </a:fld>
             <a:endParaRPr lang="en-US"/>
           </a:p>
@@ -2661,7 +2669,7 @@
           <a:p>
             <a:fld id="{148CC95F-0247-41B6-91CF-DC97C76A7088}" type="slidenum">
               <a:rPr lang="en-US" smtClean="0"/>
-              <a:t>‹#›</a:t>
+              <a:t>‹n°›</a:t>
             </a:fld>
             <a:endParaRPr lang="en-US"/>
           </a:p>
@@ -2841,7 +2849,7 @@
           <a:p>
             <a:fld id="{148CC95F-0247-41B6-91CF-DC97C76A7088}" type="slidenum">
               <a:rPr lang="en-US" smtClean="0"/>
-              <a:t>‹#›</a:t>
+              <a:t>‹n°›</a:t>
             </a:fld>
             <a:endParaRPr lang="en-US"/>
           </a:p>
@@ -3011,7 +3019,7 @@
           <a:p>
             <a:fld id="{148CC95F-0247-41B6-91CF-DC97C76A7088}" type="slidenum">
               <a:rPr lang="en-US" smtClean="0"/>
-              <a:t>‹#›</a:t>
+              <a:t>‹n°›</a:t>
             </a:fld>
             <a:endParaRPr lang="en-US"/>
           </a:p>
@@ -3268,7 +3276,7 @@
           <a:p>
             <a:fld id="{148CC95F-0247-41B6-91CF-DC97C76A7088}" type="slidenum">
               <a:rPr lang="en-US" smtClean="0"/>
-              <a:t>‹#›</a:t>
+              <a:t>‹n°›</a:t>
             </a:fld>
             <a:endParaRPr lang="en-US"/>
           </a:p>
@@ -3560,7 +3568,7 @@
           <a:p>
             <a:fld id="{148CC95F-0247-41B6-91CF-DC97C76A7088}" type="slidenum">
               <a:rPr lang="en-US" smtClean="0"/>
-              <a:t>‹#›</a:t>
+              <a:t>‹n°›</a:t>
             </a:fld>
             <a:endParaRPr lang="en-US"/>
           </a:p>
@@ -3990,7 +3998,7 @@
           <a:p>
             <a:fld id="{148CC95F-0247-41B6-91CF-DC97C76A7088}" type="slidenum">
               <a:rPr lang="en-US" smtClean="0"/>
-              <a:t>‹#›</a:t>
+              <a:t>‹n°›</a:t>
             </a:fld>
             <a:endParaRPr lang="en-US"/>
           </a:p>
@@ -4108,7 +4116,7 @@
           <a:p>
             <a:fld id="{148CC95F-0247-41B6-91CF-DC97C76A7088}" type="slidenum">
               <a:rPr lang="en-US" smtClean="0"/>
-              <a:t>‹#›</a:t>
+              <a:t>‹n°›</a:t>
             </a:fld>
             <a:endParaRPr lang="en-US"/>
           </a:p>
@@ -4203,7 +4211,7 @@
           <a:p>
             <a:fld id="{148CC95F-0247-41B6-91CF-DC97C76A7088}" type="slidenum">
               <a:rPr lang="en-US" smtClean="0"/>
-              <a:t>‹#›</a:t>
+              <a:t>‹n°›</a:t>
             </a:fld>
             <a:endParaRPr lang="en-US"/>
           </a:p>
@@ -4486,7 +4494,7 @@
           <a:p>
             <a:fld id="{148CC95F-0247-41B6-91CF-DC97C76A7088}" type="slidenum">
               <a:rPr lang="en-US" smtClean="0"/>
-              <a:t>‹#›</a:t>
+              <a:t>‹n°›</a:t>
             </a:fld>
             <a:endParaRPr lang="en-US"/>
           </a:p>
@@ -4787,7 +4795,7 @@
           <a:p>
             <a:fld id="{148CC95F-0247-41B6-91CF-DC97C76A7088}" type="slidenum">
               <a:rPr lang="en-US" smtClean="0"/>
-              <a:t>‹#›</a:t>
+              <a:t>‹n°›</a:t>
             </a:fld>
             <a:endParaRPr lang="en-US"/>
           </a:p>
@@ -5062,7 +5070,7 @@
             <a:fld id="{148CC95F-0247-41B6-91CF-DC97C76A7088}" type="slidenum">
               <a:rPr lang="en-US" smtClean="0"/>
               <a:pPr/>
-              <a:t>‹#›</a:t>
+              <a:t>‹n°›</a:t>
             </a:fld>
             <a:endParaRPr lang="en-US"/>
           </a:p>
@@ -5893,6 +5901,305 @@
 <file path=ppt/slides/slide2.xml><?xml version="1.0" encoding="utf-8"?>
 <p:sld xmlns:a="http://schemas.openxmlformats.org/drawingml/2006/main" xmlns:r="http://schemas.openxmlformats.org/officeDocument/2006/relationships" xmlns:p="http://schemas.openxmlformats.org/presentationml/2006/main">
   <p:cSld>
+    <p:spTree>
+      <p:nvGrpSpPr>
+        <p:cNvPr id="1" name="">
+          <a:extLst>
+            <a:ext uri="{FF2B5EF4-FFF2-40B4-BE49-F238E27FC236}">
+              <a16:creationId xmlns:a16="http://schemas.microsoft.com/office/drawing/2014/main" id="{D9588298-0D42-B5B9-318A-16FB63A0D33D}"/>
+            </a:ext>
+          </a:extLst>
+        </p:cNvPr>
+        <p:cNvGrpSpPr/>
+        <p:nvPr/>
+      </p:nvGrpSpPr>
+      <p:grpSpPr>
+        <a:xfrm>
+          <a:off x="0" y="0"/>
+          <a:ext cx="0" cy="0"/>
+          <a:chOff x="0" y="0"/>
+          <a:chExt cx="0" cy="0"/>
+        </a:xfrm>
+      </p:grpSpPr>
+      <p:pic>
+        <p:nvPicPr>
+          <p:cNvPr id="4" name="Picture 3">
+            <a:extLst>
+              <a:ext uri="{FF2B5EF4-FFF2-40B4-BE49-F238E27FC236}">
+                <a16:creationId xmlns:a16="http://schemas.microsoft.com/office/drawing/2014/main" id="{C1A79A32-35F2-99D7-DC97-9A87A1ABCF54}"/>
+              </a:ext>
+            </a:extLst>
+          </p:cNvPr>
+          <p:cNvPicPr>
+            <a:picLocks noChangeAspect="1"/>
+          </p:cNvPicPr>
+          <p:nvPr/>
+        </p:nvPicPr>
+        <p:blipFill>
+          <a:blip r:embed="rId2">
+            <a:alphaModFix amt="15000"/>
+          </a:blip>
+          <a:srcRect t="7098" b="2176"/>
+          <a:stretch>
+            <a:fillRect/>
+          </a:stretch>
+        </p:blipFill>
+        <p:spPr>
+          <a:xfrm>
+            <a:off x="20" y="10"/>
+            <a:ext cx="12191979" cy="6857990"/>
+          </a:xfrm>
+          <a:prstGeom prst="rect">
+            <a:avLst/>
+          </a:prstGeom>
+        </p:spPr>
+      </p:pic>
+      <p:sp>
+        <p:nvSpPr>
+          <p:cNvPr id="2" name="Title 1">
+            <a:extLst>
+              <a:ext uri="{FF2B5EF4-FFF2-40B4-BE49-F238E27FC236}">
+                <a16:creationId xmlns:a16="http://schemas.microsoft.com/office/drawing/2014/main" id="{2A7DFE18-DBB8-8ABF-A386-1AB7B212FFCE}"/>
+              </a:ext>
+            </a:extLst>
+          </p:cNvPr>
+          <p:cNvSpPr>
+            <a:spLocks noGrp="1"/>
+          </p:cNvSpPr>
+          <p:nvPr>
+            <p:ph type="title"/>
+          </p:nvPr>
+        </p:nvSpPr>
+        <p:spPr>
+          <a:xfrm>
+            <a:off x="1141410" y="114305"/>
+            <a:ext cx="3549121" cy="1371600"/>
+          </a:xfrm>
+        </p:spPr>
+        <p:txBody>
+          <a:bodyPr>
+            <a:normAutofit/>
+          </a:bodyPr>
+          <a:lstStyle/>
+          <a:p>
+            <a:pPr algn="ctr"/>
+            <a:r>
+              <a:rPr lang="fr-FR" sz="5400" b="1" dirty="0"/>
+              <a:t>Exemple</a:t>
+            </a:r>
+            <a:endParaRPr lang="fr-FR" sz="5400" b="1" noProof="0" dirty="0"/>
+          </a:p>
+        </p:txBody>
+      </p:sp>
+      <p:sp>
+        <p:nvSpPr>
+          <p:cNvPr id="5" name="Content Placeholder 4">
+            <a:extLst>
+              <a:ext uri="{FF2B5EF4-FFF2-40B4-BE49-F238E27FC236}">
+                <a16:creationId xmlns:a16="http://schemas.microsoft.com/office/drawing/2014/main" id="{0503E4BA-3352-92B4-0DFC-CB4EC11C0A70}"/>
+              </a:ext>
+            </a:extLst>
+          </p:cNvPr>
+          <p:cNvSpPr>
+            <a:spLocks noGrp="1"/>
+          </p:cNvSpPr>
+          <p:nvPr>
+            <p:ph idx="1"/>
+          </p:nvPr>
+        </p:nvSpPr>
+        <p:spPr/>
+        <p:txBody>
+          <a:bodyPr/>
+          <a:lstStyle/>
+          <a:p>
+            <a:r>
+              <a:rPr lang="fr-FR" u="sng" dirty="0"/>
+              <a:t>Ce qui se produit lorsqu’1 ou + disque en panne</a:t>
+            </a:r>
+          </a:p>
+          <a:p>
+            <a:r>
+              <a:rPr lang="fr-FR" u="sng" dirty="0"/>
+              <a:t>1 avantage important</a:t>
+            </a:r>
+          </a:p>
+          <a:p>
+            <a:r>
+              <a:rPr lang="fr-FR" u="sng" noProof="0" dirty="0"/>
+              <a:t>Une limite ou un compromis</a:t>
+            </a:r>
+          </a:p>
+          <a:p>
+            <a:r>
+              <a:rPr lang="fr-FR" u="sng" noProof="0" dirty="0"/>
+              <a:t>Principe général</a:t>
+            </a:r>
+          </a:p>
+          <a:p>
+            <a:r>
+              <a:rPr lang="fr-FR" u="sng" dirty="0"/>
+              <a:t>1 </a:t>
+            </a:r>
+            <a:r>
+              <a:rPr lang="fr-FR" u="sng" dirty="0" err="1"/>
+              <a:t>schema</a:t>
+            </a:r>
+            <a:r>
+              <a:rPr lang="fr-FR" u="sng" dirty="0"/>
+              <a:t> avec organisation de données.</a:t>
+            </a:r>
+            <a:endParaRPr lang="fr-FR" u="sng" noProof="0" dirty="0"/>
+          </a:p>
+        </p:txBody>
+      </p:sp>
+      <p:sp>
+        <p:nvSpPr>
+          <p:cNvPr id="6" name="Text Placeholder 5">
+            <a:extLst>
+              <a:ext uri="{FF2B5EF4-FFF2-40B4-BE49-F238E27FC236}">
+                <a16:creationId xmlns:a16="http://schemas.microsoft.com/office/drawing/2014/main" id="{9B858634-47B1-D6B3-2D59-09E30B358E2A}"/>
+              </a:ext>
+            </a:extLst>
+          </p:cNvPr>
+          <p:cNvSpPr>
+            <a:spLocks noGrp="1"/>
+          </p:cNvSpPr>
+          <p:nvPr>
+            <p:ph type="body" sz="half" idx="2"/>
+          </p:nvPr>
+        </p:nvSpPr>
+        <p:spPr/>
+        <p:txBody>
+          <a:bodyPr/>
+          <a:lstStyle/>
+          <a:p>
+            <a:r>
+              <a:rPr lang="fr-FR" dirty="0"/>
+              <a:t>Nombre min de disque requis</a:t>
+            </a:r>
+          </a:p>
+          <a:p>
+            <a:r>
+              <a:rPr lang="fr-FR" noProof="0" dirty="0"/>
+              <a:t>Capacité utilisable du min de disque avec 2 To chacun</a:t>
+            </a:r>
+          </a:p>
+        </p:txBody>
+      </p:sp>
+      <p:sp>
+        <p:nvSpPr>
+          <p:cNvPr id="3" name="Ellipse 2">
+            <a:extLst>
+              <a:ext uri="{FF2B5EF4-FFF2-40B4-BE49-F238E27FC236}">
+                <a16:creationId xmlns:a16="http://schemas.microsoft.com/office/drawing/2014/main" id="{E2C9A555-64B0-0260-B2E1-B69974AE7714}"/>
+              </a:ext>
+            </a:extLst>
+          </p:cNvPr>
+          <p:cNvSpPr/>
+          <p:nvPr/>
+        </p:nvSpPr>
+        <p:spPr>
+          <a:xfrm>
+            <a:off x="5027416" y="4800600"/>
+            <a:ext cx="2804948" cy="1371600"/>
+          </a:xfrm>
+          <a:prstGeom prst="ellipse">
+            <a:avLst/>
+          </a:prstGeom>
+          <a:ln>
+            <a:solidFill>
+              <a:srgbClr val="002060"/>
+            </a:solidFill>
+          </a:ln>
+        </p:spPr>
+        <p:style>
+          <a:lnRef idx="2">
+            <a:schemeClr val="accent6"/>
+          </a:lnRef>
+          <a:fillRef idx="1">
+            <a:schemeClr val="lt1"/>
+          </a:fillRef>
+          <a:effectRef idx="0">
+            <a:schemeClr val="accent6"/>
+          </a:effectRef>
+          <a:fontRef idx="minor">
+            <a:schemeClr val="dk1"/>
+          </a:fontRef>
+        </p:style>
+        <p:txBody>
+          <a:bodyPr rtlCol="0" anchor="ctr"/>
+          <a:lstStyle/>
+          <a:p>
+            <a:pPr algn="ctr"/>
+            <a:endParaRPr lang="en-US" dirty="0"/>
+          </a:p>
+        </p:txBody>
+      </p:sp>
+      <p:sp>
+        <p:nvSpPr>
+          <p:cNvPr id="10" name="Ellipse 9">
+            <a:extLst>
+              <a:ext uri="{FF2B5EF4-FFF2-40B4-BE49-F238E27FC236}">
+                <a16:creationId xmlns:a16="http://schemas.microsoft.com/office/drawing/2014/main" id="{50D2F08E-F038-E3C3-DA5E-8E3F72B5C3A5}"/>
+              </a:ext>
+            </a:extLst>
+          </p:cNvPr>
+          <p:cNvSpPr/>
+          <p:nvPr/>
+        </p:nvSpPr>
+        <p:spPr>
+          <a:xfrm>
+            <a:off x="8245644" y="4800600"/>
+            <a:ext cx="2804948" cy="1371600"/>
+          </a:xfrm>
+          <a:prstGeom prst="ellipse">
+            <a:avLst/>
+          </a:prstGeom>
+          <a:ln>
+            <a:solidFill>
+              <a:srgbClr val="002060"/>
+            </a:solidFill>
+          </a:ln>
+        </p:spPr>
+        <p:style>
+          <a:lnRef idx="2">
+            <a:schemeClr val="accent6"/>
+          </a:lnRef>
+          <a:fillRef idx="1">
+            <a:schemeClr val="lt1"/>
+          </a:fillRef>
+          <a:effectRef idx="0">
+            <a:schemeClr val="accent6"/>
+          </a:effectRef>
+          <a:fontRef idx="minor">
+            <a:schemeClr val="dk1"/>
+          </a:fontRef>
+        </p:style>
+        <p:txBody>
+          <a:bodyPr rtlCol="0" anchor="ctr"/>
+          <a:lstStyle/>
+          <a:p>
+            <a:pPr algn="ctr"/>
+            <a:endParaRPr lang="fr-CA"/>
+          </a:p>
+        </p:txBody>
+      </p:sp>
+    </p:spTree>
+    <p:extLst>
+      <p:ext uri="{BB962C8B-B14F-4D97-AF65-F5344CB8AC3E}">
+        <p14:creationId xmlns:p14="http://schemas.microsoft.com/office/powerpoint/2010/main" val="1407178413"/>
+      </p:ext>
+    </p:extLst>
+  </p:cSld>
+  <p:clrMapOvr>
+    <a:masterClrMapping/>
+  </p:clrMapOvr>
+</p:sld>
+</file>
+
+<file path=ppt/slides/slide3.xml><?xml version="1.0" encoding="utf-8"?>
+<p:sld xmlns:a="http://schemas.openxmlformats.org/drawingml/2006/main" xmlns:r="http://schemas.openxmlformats.org/officeDocument/2006/relationships" xmlns:p="http://schemas.openxmlformats.org/presentationml/2006/main">
+  <p:cSld>
     <p:bg>
       <p:bgPr>
         <a:blipFill rotWithShape="1">
@@ -6028,63 +6335,29 @@
           <a:p>
             <a:r>
               <a:rPr lang="fr-FR" noProof="0" dirty="0"/>
-              <a:t>- Aucunes </a:t>
-            </a:r>
-            <a:r>
-              <a:rPr lang="fr-FR" noProof="0" dirty="0" err="1"/>
-              <a:t>tolerances</a:t>
-            </a:r>
+              <a:t>Accès à le plus d’espaces  moyennant plus de risque.</a:t>
+            </a:r>
+          </a:p>
+          <a:p>
             <a:endParaRPr lang="fr-FR" noProof="0" dirty="0"/>
           </a:p>
           <a:p>
             <a:r>
               <a:rPr lang="fr-FR" noProof="0" dirty="0"/>
-              <a:t>- capacité = n x D</a:t>
-            </a:r>
-          </a:p>
-          <a:p>
+              <a:t>Distribue les fichiers dans tous les disques pour augmenter le nombre de mémoire donnée au processeur en même temps. </a:t>
+            </a:r>
+            <a:endParaRPr lang="fr-FR" dirty="0"/>
+          </a:p>
+          <a:p>
+            <a:pPr marL="0" indent="0">
+              <a:buNone/>
+            </a:pPr>
             <a:endParaRPr lang="fr-FR" noProof="0" dirty="0"/>
           </a:p>
           <a:p>
             <a:r>
               <a:rPr lang="fr-FR" noProof="0" dirty="0"/>
-              <a:t>Divises les fichiers en 2 disques pour augmenter le nombre de mémoire donnée au processeur en même temps. Si 1 crash, ce n’est pas </a:t>
-            </a:r>
-            <a:r>
-              <a:rPr lang="fr-FR" noProof="0" dirty="0" err="1"/>
-              <a:t>recuperable</a:t>
-            </a:r>
-            <a:endParaRPr lang="fr-FR" noProof="0" dirty="0"/>
-          </a:p>
-          <a:p>
-            <a:endParaRPr lang="fr-FR" noProof="0" dirty="0"/>
-          </a:p>
-          <a:p>
-            <a:r>
-              <a:rPr lang="fr-FR" noProof="0" dirty="0"/>
-              <a:t> </a:t>
-            </a:r>
-            <a:r>
-              <a:rPr lang="fr-FR" u="sng" noProof="0" dirty="0"/>
-              <a:t>disque A   disque B</a:t>
-            </a:r>
-          </a:p>
-          <a:p>
-            <a:r>
-              <a:rPr lang="fr-FR" u="sng" noProof="0" dirty="0"/>
-              <a:t>bloc 1       A1         A2</a:t>
-            </a:r>
-          </a:p>
-          <a:p>
-            <a:r>
-              <a:rPr lang="fr-FR" u="sng" noProof="0" dirty="0"/>
-              <a:t>bloc 2       A3         A4</a:t>
-            </a:r>
-          </a:p>
-          <a:p>
-            <a:r>
-              <a:rPr lang="fr-FR" u="sng" noProof="0" dirty="0"/>
-              <a:t>bloc 3       A5         A6</a:t>
+              <a:t>Données (D) réparties :</a:t>
             </a:r>
           </a:p>
         </p:txBody>
@@ -6105,15 +6378,208 @@
             <p:ph type="body" sz="half" idx="2"/>
           </p:nvPr>
         </p:nvSpPr>
-        <p:spPr/>
-        <p:txBody>
-          <a:bodyPr/>
-          <a:lstStyle/>
-          <a:p>
-            <a:r>
-              <a:rPr lang="fr-FR" noProof="0" dirty="0"/>
-              <a:t>Minimum : 2 disques</a:t>
-            </a:r>
+        <p:spPr>
+          <a:xfrm>
+            <a:off x="689047" y="2427515"/>
+            <a:ext cx="4453846" cy="2209800"/>
+          </a:xfrm>
+        </p:spPr>
+        <p:txBody>
+          <a:bodyPr>
+            <a:noAutofit/>
+          </a:bodyPr>
+          <a:lstStyle/>
+          <a:p>
+            <a:r>
+              <a:rPr lang="fr-FR" sz="1400" b="1" dirty="0"/>
+              <a:t>Sécurité</a:t>
+            </a:r>
+            <a:r>
+              <a:rPr lang="fr-FR" sz="1400" b="1" noProof="0" dirty="0"/>
+              <a:t> : </a:t>
+            </a:r>
+            <a:r>
+              <a:rPr lang="fr-FR" sz="1400" noProof="0" dirty="0"/>
+              <a:t>on perd les données.			</a:t>
+            </a:r>
+          </a:p>
+          <a:p>
+            <a:endParaRPr lang="fr-FR" sz="1400" dirty="0"/>
+          </a:p>
+          <a:p>
+            <a:r>
+              <a:rPr lang="fr-FR" sz="1400" b="1" dirty="0"/>
+              <a:t>Pour 2 disques de 2 To : </a:t>
+            </a:r>
+            <a:r>
+              <a:rPr lang="fr-FR" sz="1400" dirty="0"/>
+              <a:t>la capacité est de 4 To</a:t>
+            </a:r>
+          </a:p>
+          <a:p>
+            <a:endParaRPr lang="fr-FR" sz="1400" noProof="0" dirty="0"/>
+          </a:p>
+          <a:p>
+            <a:r>
+              <a:rPr lang="fr-FR" sz="1400" dirty="0"/>
+              <a:t>			</a:t>
+            </a:r>
+            <a:r>
+              <a:rPr lang="fr-FR" sz="1400" b="1" noProof="0" dirty="0"/>
+              <a:t>Minimum disque requis: </a:t>
+            </a:r>
+            <a:r>
+              <a:rPr lang="fr-FR" sz="1400" noProof="0" dirty="0"/>
+              <a:t>2 disques</a:t>
+            </a:r>
+          </a:p>
+        </p:txBody>
+      </p:sp>
+      <p:sp>
+        <p:nvSpPr>
+          <p:cNvPr id="7" name="Ellipse 6">
+            <a:extLst>
+              <a:ext uri="{FF2B5EF4-FFF2-40B4-BE49-F238E27FC236}">
+                <a16:creationId xmlns:a16="http://schemas.microsoft.com/office/drawing/2014/main" id="{A827A018-D744-E646-5094-31A5757E09DB}"/>
+              </a:ext>
+            </a:extLst>
+          </p:cNvPr>
+          <p:cNvSpPr/>
+          <p:nvPr/>
+        </p:nvSpPr>
+        <p:spPr>
+          <a:xfrm>
+            <a:off x="5234056" y="4795152"/>
+            <a:ext cx="2804948" cy="1371600"/>
+          </a:xfrm>
+          <a:prstGeom prst="ellipse">
+            <a:avLst/>
+          </a:prstGeom>
+          <a:ln>
+            <a:solidFill>
+              <a:srgbClr val="002060"/>
+            </a:solidFill>
+          </a:ln>
+        </p:spPr>
+        <p:style>
+          <a:lnRef idx="2">
+            <a:schemeClr val="accent6"/>
+          </a:lnRef>
+          <a:fillRef idx="1">
+            <a:schemeClr val="lt1"/>
+          </a:fillRef>
+          <a:effectRef idx="0">
+            <a:schemeClr val="accent6"/>
+          </a:effectRef>
+          <a:fontRef idx="minor">
+            <a:schemeClr val="dk1"/>
+          </a:fontRef>
+        </p:style>
+        <p:txBody>
+          <a:bodyPr rtlCol="0" anchor="ctr"/>
+          <a:lstStyle/>
+          <a:p>
+            <a:pPr algn="ctr"/>
+            <a:r>
+              <a:rPr lang="en-US" dirty="0"/>
+              <a:t>Disque A</a:t>
+            </a:r>
+          </a:p>
+          <a:p>
+            <a:pPr algn="ctr"/>
+            <a:r>
+              <a:rPr lang="en-US" dirty="0"/>
+              <a:t>D1</a:t>
+            </a:r>
+          </a:p>
+          <a:p>
+            <a:pPr algn="ctr"/>
+            <a:r>
+              <a:rPr lang="en-US" dirty="0"/>
+              <a:t>D3</a:t>
+            </a:r>
+          </a:p>
+          <a:p>
+            <a:pPr algn="ctr"/>
+            <a:r>
+              <a:rPr lang="en-US" dirty="0"/>
+              <a:t>D5</a:t>
+            </a:r>
+            <a:endParaRPr lang="fr-CA" dirty="0"/>
+          </a:p>
+        </p:txBody>
+      </p:sp>
+      <p:sp>
+        <p:nvSpPr>
+          <p:cNvPr id="9" name="Ellipse 8">
+            <a:extLst>
+              <a:ext uri="{FF2B5EF4-FFF2-40B4-BE49-F238E27FC236}">
+                <a16:creationId xmlns:a16="http://schemas.microsoft.com/office/drawing/2014/main" id="{9E548437-4AA0-DB0F-A68E-D848AB0F227A}"/>
+              </a:ext>
+            </a:extLst>
+          </p:cNvPr>
+          <p:cNvSpPr/>
+          <p:nvPr/>
+        </p:nvSpPr>
+        <p:spPr>
+          <a:xfrm>
+            <a:off x="8245644" y="4800600"/>
+            <a:ext cx="2804948" cy="1371600"/>
+          </a:xfrm>
+          <a:prstGeom prst="ellipse">
+            <a:avLst/>
+          </a:prstGeom>
+          <a:ln>
+            <a:solidFill>
+              <a:srgbClr val="002060"/>
+            </a:solidFill>
+          </a:ln>
+        </p:spPr>
+        <p:style>
+          <a:lnRef idx="2">
+            <a:schemeClr val="accent6"/>
+          </a:lnRef>
+          <a:fillRef idx="1">
+            <a:schemeClr val="lt1"/>
+          </a:fillRef>
+          <a:effectRef idx="0">
+            <a:schemeClr val="accent6"/>
+          </a:effectRef>
+          <a:fontRef idx="minor">
+            <a:schemeClr val="dk1"/>
+          </a:fontRef>
+        </p:style>
+        <p:txBody>
+          <a:bodyPr rtlCol="0" anchor="ctr"/>
+          <a:lstStyle/>
+          <a:p>
+            <a:pPr algn="ctr"/>
+            <a:r>
+              <a:rPr lang="en-US" dirty="0"/>
+              <a:t>Disque B</a:t>
+            </a:r>
+          </a:p>
+          <a:p>
+            <a:pPr algn="ctr"/>
+            <a:r>
+              <a:rPr lang="en-US" dirty="0"/>
+              <a:t>D2</a:t>
+            </a:r>
+          </a:p>
+          <a:p>
+            <a:pPr algn="ctr"/>
+            <a:r>
+              <a:rPr lang="en-US" dirty="0"/>
+              <a:t>D4</a:t>
+            </a:r>
+          </a:p>
+          <a:p>
+            <a:pPr algn="ctr"/>
+            <a:r>
+              <a:rPr lang="en-US" dirty="0"/>
+              <a:t>D6</a:t>
+            </a:r>
+            <a:endParaRPr lang="fr-CA" dirty="0"/>
           </a:p>
         </p:txBody>
       </p:sp>
@@ -6130,38 +6596,15 @@
 </p:sld>
 </file>
 
-<file path=ppt/slides/slide3.xml><?xml version="1.0" encoding="utf-8"?>
+<file path=ppt/slides/slide4.xml><?xml version="1.0" encoding="utf-8"?>
 <p:sld xmlns:a="http://schemas.openxmlformats.org/drawingml/2006/main" xmlns:r="http://schemas.openxmlformats.org/officeDocument/2006/relationships" xmlns:p="http://schemas.openxmlformats.org/presentationml/2006/main">
   <p:cSld>
-    <p:bg>
-      <p:bgPr>
-        <a:blipFill rotWithShape="1">
-          <a:blip r:embed="rId2">
-            <a:duotone>
-              <a:schemeClr val="bg2">
-                <a:shade val="28000"/>
-                <a:satMod val="94000"/>
-                <a:lumMod val="20000"/>
-              </a:schemeClr>
-              <a:schemeClr val="bg2">
-                <a:tint val="94000"/>
-                <a:shade val="84000"/>
-                <a:satMod val="148000"/>
-                <a:lumMod val="114000"/>
-              </a:schemeClr>
-            </a:duotone>
-          </a:blip>
-          <a:stretch/>
-        </a:blipFill>
-        <a:effectLst/>
-      </p:bgPr>
-    </p:bg>
     <p:spTree>
       <p:nvGrpSpPr>
         <p:cNvPr id="1" name="">
           <a:extLst>
             <a:ext uri="{FF2B5EF4-FFF2-40B4-BE49-F238E27FC236}">
-              <a16:creationId xmlns:a16="http://schemas.microsoft.com/office/drawing/2014/main" id="{382F1514-AD0E-CB67-D2CC-2E54F92C8C1A}"/>
+              <a16:creationId xmlns:a16="http://schemas.microsoft.com/office/drawing/2014/main" id="{06AFFF6C-FE0D-C4F7-70A3-9A32D2821A5B}"/>
             </a:ext>
           </a:extLst>
         </p:cNvPr>
@@ -6181,7 +6624,7 @@
           <p:cNvPr id="4" name="Picture 3">
             <a:extLst>
               <a:ext uri="{FF2B5EF4-FFF2-40B4-BE49-F238E27FC236}">
-                <a16:creationId xmlns:a16="http://schemas.microsoft.com/office/drawing/2014/main" id="{E3EF4193-8114-59E7-9550-50DD9E53D129}"/>
+                <a16:creationId xmlns:a16="http://schemas.microsoft.com/office/drawing/2014/main" id="{FF869981-2505-C5DA-0C56-4E8ACE6804E2}"/>
               </a:ext>
             </a:extLst>
           </p:cNvPr>
@@ -6191,7 +6634,7 @@
           <p:nvPr/>
         </p:nvPicPr>
         <p:blipFill>
-          <a:blip r:embed="rId3">
+          <a:blip r:embed="rId2">
             <a:alphaModFix amt="15000"/>
           </a:blip>
           <a:srcRect t="7098" b="2176"/>
@@ -6214,7 +6657,7 @@
           <p:cNvPr id="2" name="Title 1">
             <a:extLst>
               <a:ext uri="{FF2B5EF4-FFF2-40B4-BE49-F238E27FC236}">
-                <a16:creationId xmlns:a16="http://schemas.microsoft.com/office/drawing/2014/main" id="{C25598BA-C387-0B5C-551B-10225600496F}"/>
+                <a16:creationId xmlns:a16="http://schemas.microsoft.com/office/drawing/2014/main" id="{DB700DA9-034F-8DC9-79F1-D74805B77365}"/>
               </a:ext>
             </a:extLst>
           </p:cNvPr>
@@ -6250,7 +6693,7 @@
           <p:cNvPr id="5" name="Content Placeholder 4">
             <a:extLst>
               <a:ext uri="{FF2B5EF4-FFF2-40B4-BE49-F238E27FC236}">
-                <a16:creationId xmlns:a16="http://schemas.microsoft.com/office/drawing/2014/main" id="{F866C8D4-7A48-1AB7-5A42-D652F02DF0D5}"/>
+                <a16:creationId xmlns:a16="http://schemas.microsoft.com/office/drawing/2014/main" id="{AA3761DB-C514-8346-AC49-8AE459BDC239}"/>
               </a:ext>
             </a:extLst>
           </p:cNvPr>
@@ -6268,72 +6711,29 @@
           <a:p>
             <a:r>
               <a:rPr lang="fr-FR" noProof="0" dirty="0"/>
-              <a:t>- Tolérance : tant qu’une copie demeure. (mirroring)</a:t>
-            </a:r>
+              <a:t>Donne + de sécurité moyennant moins d’espaces</a:t>
+            </a:r>
+          </a:p>
+          <a:p>
+            <a:endParaRPr lang="fr-FR" noProof="0" dirty="0"/>
+          </a:p>
+          <a:p>
+            <a:r>
+              <a:rPr lang="fr-FR" dirty="0"/>
+              <a:t>Les mêmes données sont générées sur les différents disques</a:t>
+            </a:r>
+          </a:p>
+          <a:p>
+            <a:pPr marL="0" indent="0">
+              <a:buNone/>
+            </a:pPr>
+            <a:endParaRPr lang="fr-FR" noProof="0" dirty="0"/>
           </a:p>
           <a:p>
             <a:r>
               <a:rPr lang="fr-FR" noProof="0" dirty="0"/>
-              <a:t>- capacité = D</a:t>
-            </a:r>
-          </a:p>
-          <a:p>
-            <a:endParaRPr lang="fr-FR" noProof="0" dirty="0"/>
-          </a:p>
-          <a:p>
-            <a:r>
-              <a:rPr lang="fr-FR" noProof="0" dirty="0"/>
-              <a:t>- Prend plus d’espace mais crée une copie sur l’autre disque</a:t>
-            </a:r>
-          </a:p>
-          <a:p>
-            <a:endParaRPr lang="fr-FR" noProof="0" dirty="0"/>
-          </a:p>
-          <a:p>
-            <a:pPr marL="0" indent="0">
-              <a:buNone/>
-            </a:pPr>
-            <a:r>
-              <a:rPr lang="fr-FR" noProof="0" dirty="0"/>
-              <a:t>	</a:t>
-            </a:r>
-            <a:r>
-              <a:rPr lang="fr-FR" u="sng" noProof="0" dirty="0"/>
-              <a:t>	disque A   disque B</a:t>
-            </a:r>
-          </a:p>
-          <a:p>
-            <a:r>
-              <a:rPr lang="fr-FR" u="sng" noProof="0" dirty="0"/>
-              <a:t>bloc 1       A1         </a:t>
-            </a:r>
-            <a:r>
-              <a:rPr lang="fr-FR" u="sng" noProof="0" dirty="0" err="1"/>
-              <a:t>A1</a:t>
-            </a:r>
-            <a:endParaRPr lang="fr-FR" u="sng" noProof="0" dirty="0"/>
-          </a:p>
-          <a:p>
-            <a:r>
-              <a:rPr lang="fr-FR" u="sng" noProof="0" dirty="0"/>
-              <a:t>bloc 2       A2         </a:t>
-            </a:r>
-            <a:r>
-              <a:rPr lang="fr-FR" u="sng" noProof="0" dirty="0" err="1"/>
-              <a:t>A2</a:t>
-            </a:r>
-            <a:endParaRPr lang="fr-FR" u="sng" noProof="0" dirty="0"/>
-          </a:p>
-          <a:p>
-            <a:r>
-              <a:rPr lang="fr-FR" u="sng" noProof="0" dirty="0"/>
-              <a:t>bloc 3       A3         </a:t>
-            </a:r>
-            <a:r>
-              <a:rPr lang="fr-FR" u="sng" noProof="0" dirty="0" err="1"/>
-              <a:t>A3</a:t>
-            </a:r>
-            <a:endParaRPr lang="fr-FR" u="sng" noProof="0" dirty="0"/>
+              <a:t>Données (D) réparties :</a:t>
+            </a:r>
           </a:p>
         </p:txBody>
       </p:sp>
@@ -6342,7 +6742,7 @@
           <p:cNvPr id="6" name="Text Placeholder 5">
             <a:extLst>
               <a:ext uri="{FF2B5EF4-FFF2-40B4-BE49-F238E27FC236}">
-                <a16:creationId xmlns:a16="http://schemas.microsoft.com/office/drawing/2014/main" id="{012B9280-2691-1202-86B1-929AEF5450BF}"/>
+                <a16:creationId xmlns:a16="http://schemas.microsoft.com/office/drawing/2014/main" id="{6EBB28EB-71FC-F604-A5BE-A785B89ACCB4}"/>
               </a:ext>
             </a:extLst>
           </p:cNvPr>
@@ -6353,22 +6753,215 @@
             <p:ph type="body" sz="half" idx="2"/>
           </p:nvPr>
         </p:nvSpPr>
-        <p:spPr/>
-        <p:txBody>
-          <a:bodyPr/>
-          <a:lstStyle/>
-          <a:p>
-            <a:r>
-              <a:rPr lang="fr-FR" noProof="0" dirty="0"/>
-              <a:t>Minimum : 2 disques</a:t>
-            </a:r>
+        <p:spPr>
+          <a:xfrm>
+            <a:off x="689047" y="2427515"/>
+            <a:ext cx="4453846" cy="2209800"/>
+          </a:xfrm>
+        </p:spPr>
+        <p:txBody>
+          <a:bodyPr>
+            <a:noAutofit/>
+          </a:bodyPr>
+          <a:lstStyle/>
+          <a:p>
+            <a:r>
+              <a:rPr lang="fr-FR" sz="1400" b="1" dirty="0"/>
+              <a:t>Sécurité : </a:t>
+            </a:r>
+            <a:r>
+              <a:rPr lang="fr-FR" sz="1400" dirty="0"/>
+              <a:t>Peut survivre les pannes si 1 disque en vie</a:t>
+            </a:r>
+            <a:r>
+              <a:rPr lang="fr-FR" sz="1400" noProof="0" dirty="0"/>
+              <a:t> 		</a:t>
+            </a:r>
+          </a:p>
+          <a:p>
+            <a:endParaRPr lang="fr-FR" sz="1400" dirty="0"/>
+          </a:p>
+          <a:p>
+            <a:r>
+              <a:rPr lang="fr-FR" sz="1400" b="1" dirty="0"/>
+              <a:t>Pour 2 disques de 2 To : </a:t>
+            </a:r>
+            <a:r>
+              <a:rPr lang="fr-FR" sz="1400" dirty="0"/>
+              <a:t>la capacité est de 2 To</a:t>
+            </a:r>
+          </a:p>
+          <a:p>
+            <a:endParaRPr lang="fr-FR" sz="1400" noProof="0" dirty="0"/>
+          </a:p>
+          <a:p>
+            <a:r>
+              <a:rPr lang="fr-FR" sz="1400" dirty="0"/>
+              <a:t>			</a:t>
+            </a:r>
+            <a:r>
+              <a:rPr lang="fr-FR" sz="1400" b="1" noProof="0" dirty="0"/>
+              <a:t>Minimum disque requis: </a:t>
+            </a:r>
+            <a:r>
+              <a:rPr lang="fr-FR" sz="1400" noProof="0" dirty="0"/>
+              <a:t>2 disques</a:t>
+            </a:r>
+          </a:p>
+        </p:txBody>
+      </p:sp>
+      <p:sp>
+        <p:nvSpPr>
+          <p:cNvPr id="7" name="Ellipse 6">
+            <a:extLst>
+              <a:ext uri="{FF2B5EF4-FFF2-40B4-BE49-F238E27FC236}">
+                <a16:creationId xmlns:a16="http://schemas.microsoft.com/office/drawing/2014/main" id="{DB216941-2B80-4B9E-C4B1-FE874A55A9D5}"/>
+              </a:ext>
+            </a:extLst>
+          </p:cNvPr>
+          <p:cNvSpPr/>
+          <p:nvPr/>
+        </p:nvSpPr>
+        <p:spPr>
+          <a:xfrm>
+            <a:off x="5234056" y="4795152"/>
+            <a:ext cx="2804948" cy="1371600"/>
+          </a:xfrm>
+          <a:prstGeom prst="ellipse">
+            <a:avLst/>
+          </a:prstGeom>
+          <a:ln>
+            <a:solidFill>
+              <a:srgbClr val="002060"/>
+            </a:solidFill>
+          </a:ln>
+        </p:spPr>
+        <p:style>
+          <a:lnRef idx="2">
+            <a:schemeClr val="accent6"/>
+          </a:lnRef>
+          <a:fillRef idx="1">
+            <a:schemeClr val="lt1"/>
+          </a:fillRef>
+          <a:effectRef idx="0">
+            <a:schemeClr val="accent6"/>
+          </a:effectRef>
+          <a:fontRef idx="minor">
+            <a:schemeClr val="dk1"/>
+          </a:fontRef>
+        </p:style>
+        <p:txBody>
+          <a:bodyPr rtlCol="0" anchor="ctr"/>
+          <a:lstStyle/>
+          <a:p>
+            <a:pPr algn="ctr"/>
+            <a:r>
+              <a:rPr lang="en-US" dirty="0"/>
+              <a:t>Disque A</a:t>
+            </a:r>
+          </a:p>
+          <a:p>
+            <a:pPr algn="ctr"/>
+            <a:r>
+              <a:rPr lang="en-US" dirty="0"/>
+              <a:t>D1</a:t>
+            </a:r>
+          </a:p>
+          <a:p>
+            <a:pPr algn="ctr"/>
+            <a:r>
+              <a:rPr lang="en-US" dirty="0"/>
+              <a:t>D2</a:t>
+            </a:r>
+          </a:p>
+          <a:p>
+            <a:pPr algn="ctr"/>
+            <a:r>
+              <a:rPr lang="en-US" dirty="0"/>
+              <a:t>D3</a:t>
+            </a:r>
+            <a:endParaRPr lang="fr-CA" dirty="0"/>
+          </a:p>
+        </p:txBody>
+      </p:sp>
+      <p:sp>
+        <p:nvSpPr>
+          <p:cNvPr id="9" name="Ellipse 8">
+            <a:extLst>
+              <a:ext uri="{FF2B5EF4-FFF2-40B4-BE49-F238E27FC236}">
+                <a16:creationId xmlns:a16="http://schemas.microsoft.com/office/drawing/2014/main" id="{54DD2A17-7A38-A33F-360B-28822A930479}"/>
+              </a:ext>
+            </a:extLst>
+          </p:cNvPr>
+          <p:cNvSpPr/>
+          <p:nvPr/>
+        </p:nvSpPr>
+        <p:spPr>
+          <a:xfrm>
+            <a:off x="8245644" y="4800600"/>
+            <a:ext cx="2804948" cy="1371600"/>
+          </a:xfrm>
+          <a:prstGeom prst="ellipse">
+            <a:avLst/>
+          </a:prstGeom>
+          <a:ln>
+            <a:solidFill>
+              <a:srgbClr val="002060"/>
+            </a:solidFill>
+          </a:ln>
+        </p:spPr>
+        <p:style>
+          <a:lnRef idx="2">
+            <a:schemeClr val="accent6"/>
+          </a:lnRef>
+          <a:fillRef idx="1">
+            <a:schemeClr val="lt1"/>
+          </a:fillRef>
+          <a:effectRef idx="0">
+            <a:schemeClr val="accent6"/>
+          </a:effectRef>
+          <a:fontRef idx="minor">
+            <a:schemeClr val="dk1"/>
+          </a:fontRef>
+        </p:style>
+        <p:txBody>
+          <a:bodyPr rtlCol="0" anchor="ctr"/>
+          <a:lstStyle/>
+          <a:p>
+            <a:pPr algn="ctr"/>
+            <a:r>
+              <a:rPr lang="en-US" dirty="0"/>
+              <a:t>Disque B</a:t>
+            </a:r>
+          </a:p>
+          <a:p>
+            <a:pPr algn="ctr"/>
+            <a:r>
+              <a:rPr lang="en-US" dirty="0"/>
+              <a:t>D1</a:t>
+            </a:r>
+          </a:p>
+          <a:p>
+            <a:pPr algn="ctr"/>
+            <a:r>
+              <a:rPr lang="en-US" dirty="0"/>
+              <a:t>D2</a:t>
+            </a:r>
+          </a:p>
+          <a:p>
+            <a:pPr algn="ctr"/>
+            <a:r>
+              <a:rPr lang="en-US" dirty="0"/>
+              <a:t>D3</a:t>
+            </a:r>
+            <a:endParaRPr lang="fr-CA" dirty="0"/>
           </a:p>
         </p:txBody>
       </p:sp>
     </p:spTree>
     <p:extLst>
       <p:ext uri="{BB962C8B-B14F-4D97-AF65-F5344CB8AC3E}">
-        <p14:creationId xmlns:p14="http://schemas.microsoft.com/office/powerpoint/2010/main" val="3607342436"/>
+        <p14:creationId xmlns:p14="http://schemas.microsoft.com/office/powerpoint/2010/main" val="53173995"/>
       </p:ext>
     </p:extLst>
   </p:cSld>
@@ -6378,7 +6971,461 @@
 </p:sld>
 </file>
 
-<file path=ppt/slides/slide4.xml><?xml version="1.0" encoding="utf-8"?>
+<file path=ppt/slides/slide5.xml><?xml version="1.0" encoding="utf-8"?>
+<p:sld xmlns:a="http://schemas.openxmlformats.org/drawingml/2006/main" xmlns:r="http://schemas.openxmlformats.org/officeDocument/2006/relationships" xmlns:p="http://schemas.openxmlformats.org/presentationml/2006/main">
+  <p:cSld>
+    <p:spTree>
+      <p:nvGrpSpPr>
+        <p:cNvPr id="1" name="">
+          <a:extLst>
+            <a:ext uri="{FF2B5EF4-FFF2-40B4-BE49-F238E27FC236}">
+              <a16:creationId xmlns:a16="http://schemas.microsoft.com/office/drawing/2014/main" id="{E2DEC6BF-C983-303C-AA3A-15CAD8939926}"/>
+            </a:ext>
+          </a:extLst>
+        </p:cNvPr>
+        <p:cNvGrpSpPr/>
+        <p:nvPr/>
+      </p:nvGrpSpPr>
+      <p:grpSpPr>
+        <a:xfrm>
+          <a:off x="0" y="0"/>
+          <a:ext cx="0" cy="0"/>
+          <a:chOff x="0" y="0"/>
+          <a:chExt cx="0" cy="0"/>
+        </a:xfrm>
+      </p:grpSpPr>
+      <p:pic>
+        <p:nvPicPr>
+          <p:cNvPr id="4" name="Picture 3">
+            <a:extLst>
+              <a:ext uri="{FF2B5EF4-FFF2-40B4-BE49-F238E27FC236}">
+                <a16:creationId xmlns:a16="http://schemas.microsoft.com/office/drawing/2014/main" id="{F66BDBB4-A69C-44E6-219D-0005F27DA41F}"/>
+              </a:ext>
+            </a:extLst>
+          </p:cNvPr>
+          <p:cNvPicPr>
+            <a:picLocks noChangeAspect="1"/>
+          </p:cNvPicPr>
+          <p:nvPr/>
+        </p:nvPicPr>
+        <p:blipFill>
+          <a:blip r:embed="rId2">
+            <a:alphaModFix amt="15000"/>
+          </a:blip>
+          <a:srcRect t="7098" b="2176"/>
+          <a:stretch>
+            <a:fillRect/>
+          </a:stretch>
+        </p:blipFill>
+        <p:spPr>
+          <a:xfrm>
+            <a:off x="20" y="10"/>
+            <a:ext cx="12191979" cy="6857990"/>
+          </a:xfrm>
+          <a:prstGeom prst="rect">
+            <a:avLst/>
+          </a:prstGeom>
+        </p:spPr>
+      </p:pic>
+      <p:sp>
+        <p:nvSpPr>
+          <p:cNvPr id="2" name="Title 1">
+            <a:extLst>
+              <a:ext uri="{FF2B5EF4-FFF2-40B4-BE49-F238E27FC236}">
+                <a16:creationId xmlns:a16="http://schemas.microsoft.com/office/drawing/2014/main" id="{7F12DCD2-E51A-EEA5-8B31-5B8622230E34}"/>
+              </a:ext>
+            </a:extLst>
+          </p:cNvPr>
+          <p:cNvSpPr>
+            <a:spLocks noGrp="1"/>
+          </p:cNvSpPr>
+          <p:nvPr>
+            <p:ph type="title"/>
+          </p:nvPr>
+        </p:nvSpPr>
+        <p:spPr>
+          <a:xfrm>
+            <a:off x="1141410" y="114305"/>
+            <a:ext cx="3549121" cy="1371600"/>
+          </a:xfrm>
+        </p:spPr>
+        <p:txBody>
+          <a:bodyPr>
+            <a:normAutofit/>
+          </a:bodyPr>
+          <a:lstStyle/>
+          <a:p>
+            <a:pPr algn="ctr"/>
+            <a:r>
+              <a:rPr lang="fr-FR" sz="5400" b="1" noProof="0" dirty="0"/>
+              <a:t>Raid </a:t>
+            </a:r>
+            <a:r>
+              <a:rPr lang="fr-FR" sz="5400" b="1" dirty="0"/>
+              <a:t>5</a:t>
+            </a:r>
+            <a:endParaRPr lang="fr-FR" sz="5400" b="1" noProof="0" dirty="0"/>
+          </a:p>
+        </p:txBody>
+      </p:sp>
+      <p:sp>
+        <p:nvSpPr>
+          <p:cNvPr id="5" name="Content Placeholder 4">
+            <a:extLst>
+              <a:ext uri="{FF2B5EF4-FFF2-40B4-BE49-F238E27FC236}">
+                <a16:creationId xmlns:a16="http://schemas.microsoft.com/office/drawing/2014/main" id="{F8B31A33-EDF8-8505-1DC4-5064F1B2A222}"/>
+              </a:ext>
+            </a:extLst>
+          </p:cNvPr>
+          <p:cNvSpPr>
+            <a:spLocks noGrp="1"/>
+          </p:cNvSpPr>
+          <p:nvPr>
+            <p:ph idx="1"/>
+          </p:nvPr>
+        </p:nvSpPr>
+        <p:spPr/>
+        <p:txBody>
+          <a:bodyPr/>
+          <a:lstStyle/>
+          <a:p>
+            <a:r>
+              <a:rPr lang="fr-FR" dirty="0"/>
+              <a:t>Un peu plus d’espaces moyennant plus d’opérations pour calculer les parités.</a:t>
+            </a:r>
+          </a:p>
+          <a:p>
+            <a:endParaRPr lang="fr-FR" noProof="0" dirty="0"/>
+          </a:p>
+          <a:p>
+            <a:r>
+              <a:rPr lang="fr-FR" dirty="0"/>
+              <a:t>Les mêmes données sont générées sur les différents disques</a:t>
+            </a:r>
+          </a:p>
+          <a:p>
+            <a:pPr marL="0" indent="0">
+              <a:buNone/>
+            </a:pPr>
+            <a:endParaRPr lang="fr-FR" noProof="0" dirty="0"/>
+          </a:p>
+          <a:p>
+            <a:r>
+              <a:rPr lang="fr-FR" noProof="0" dirty="0"/>
+              <a:t>Données (D) et parités (P) réparties :</a:t>
+            </a:r>
+          </a:p>
+        </p:txBody>
+      </p:sp>
+      <p:sp>
+        <p:nvSpPr>
+          <p:cNvPr id="6" name="Text Placeholder 5">
+            <a:extLst>
+              <a:ext uri="{FF2B5EF4-FFF2-40B4-BE49-F238E27FC236}">
+                <a16:creationId xmlns:a16="http://schemas.microsoft.com/office/drawing/2014/main" id="{C82E0A38-974E-6B5C-A132-A5F48B9FF541}"/>
+              </a:ext>
+            </a:extLst>
+          </p:cNvPr>
+          <p:cNvSpPr>
+            <a:spLocks noGrp="1"/>
+          </p:cNvSpPr>
+          <p:nvPr>
+            <p:ph type="body" sz="half" idx="2"/>
+          </p:nvPr>
+        </p:nvSpPr>
+        <p:spPr>
+          <a:xfrm>
+            <a:off x="689047" y="2427515"/>
+            <a:ext cx="4453846" cy="2209800"/>
+          </a:xfrm>
+        </p:spPr>
+        <p:txBody>
+          <a:bodyPr>
+            <a:noAutofit/>
+          </a:bodyPr>
+          <a:lstStyle/>
+          <a:p>
+            <a:r>
+              <a:rPr lang="fr-FR" sz="1400" b="1" dirty="0"/>
+              <a:t>Sécurité : </a:t>
+            </a:r>
+            <a:r>
+              <a:rPr lang="fr-FR" sz="1400" dirty="0"/>
+              <a:t>Peut survivre les pannes si 1 disque en vie</a:t>
+            </a:r>
+            <a:r>
+              <a:rPr lang="fr-FR" sz="1400" noProof="0" dirty="0"/>
+              <a:t> 		</a:t>
+            </a:r>
+          </a:p>
+          <a:p>
+            <a:endParaRPr lang="fr-FR" sz="1400" dirty="0"/>
+          </a:p>
+          <a:p>
+            <a:r>
+              <a:rPr lang="fr-FR" sz="1400" b="1" dirty="0"/>
+              <a:t>Pour 2 disques de 2 To : </a:t>
+            </a:r>
+            <a:r>
+              <a:rPr lang="fr-FR" sz="1400" dirty="0"/>
+              <a:t>la capacité est de 2 To</a:t>
+            </a:r>
+          </a:p>
+          <a:p>
+            <a:endParaRPr lang="fr-FR" sz="1400" noProof="0" dirty="0"/>
+          </a:p>
+          <a:p>
+            <a:r>
+              <a:rPr lang="fr-FR" sz="1400" dirty="0"/>
+              <a:t>			</a:t>
+            </a:r>
+            <a:r>
+              <a:rPr lang="fr-FR" sz="1400" b="1" noProof="0" dirty="0"/>
+              <a:t>Minimum disque requis: </a:t>
+            </a:r>
+            <a:r>
+              <a:rPr lang="fr-FR" sz="1400" noProof="0" dirty="0"/>
+              <a:t>2 disques</a:t>
+            </a:r>
+          </a:p>
+        </p:txBody>
+      </p:sp>
+      <p:sp>
+        <p:nvSpPr>
+          <p:cNvPr id="7" name="Ellipse 6">
+            <a:extLst>
+              <a:ext uri="{FF2B5EF4-FFF2-40B4-BE49-F238E27FC236}">
+                <a16:creationId xmlns:a16="http://schemas.microsoft.com/office/drawing/2014/main" id="{ABAA3FCF-3E68-10D3-C02E-A6955D7B8C22}"/>
+              </a:ext>
+            </a:extLst>
+          </p:cNvPr>
+          <p:cNvSpPr/>
+          <p:nvPr/>
+        </p:nvSpPr>
+        <p:spPr>
+          <a:xfrm>
+            <a:off x="5234056" y="4795152"/>
+            <a:ext cx="2804948" cy="1371600"/>
+          </a:xfrm>
+          <a:prstGeom prst="ellipse">
+            <a:avLst/>
+          </a:prstGeom>
+          <a:ln>
+            <a:solidFill>
+              <a:srgbClr val="002060"/>
+            </a:solidFill>
+          </a:ln>
+        </p:spPr>
+        <p:style>
+          <a:lnRef idx="2">
+            <a:schemeClr val="accent6"/>
+          </a:lnRef>
+          <a:fillRef idx="1">
+            <a:schemeClr val="lt1"/>
+          </a:fillRef>
+          <a:effectRef idx="0">
+            <a:schemeClr val="accent6"/>
+          </a:effectRef>
+          <a:fontRef idx="minor">
+            <a:schemeClr val="dk1"/>
+          </a:fontRef>
+        </p:style>
+        <p:txBody>
+          <a:bodyPr rtlCol="0" anchor="ctr"/>
+          <a:lstStyle/>
+          <a:p>
+            <a:pPr algn="ctr"/>
+            <a:r>
+              <a:rPr lang="en-US" dirty="0"/>
+              <a:t>Disque B</a:t>
+            </a:r>
+          </a:p>
+          <a:p>
+            <a:pPr algn="ctr"/>
+            <a:r>
+              <a:rPr lang="en-US" dirty="0"/>
+              <a:t>P1</a:t>
+            </a:r>
+          </a:p>
+          <a:p>
+            <a:pPr algn="ctr"/>
+            <a:r>
+              <a:rPr lang="en-US" dirty="0"/>
+              <a:t>D2</a:t>
+            </a:r>
+          </a:p>
+          <a:p>
+            <a:pPr algn="ctr"/>
+            <a:r>
+              <a:rPr lang="en-US" dirty="0"/>
+              <a:t>D3</a:t>
+            </a:r>
+            <a:endParaRPr lang="fr-CA" dirty="0"/>
+          </a:p>
+        </p:txBody>
+      </p:sp>
+      <p:sp>
+        <p:nvSpPr>
+          <p:cNvPr id="9" name="Ellipse 8">
+            <a:extLst>
+              <a:ext uri="{FF2B5EF4-FFF2-40B4-BE49-F238E27FC236}">
+                <a16:creationId xmlns:a16="http://schemas.microsoft.com/office/drawing/2014/main" id="{8A23A92C-359E-8FA9-36A8-AEC49AA7EF9E}"/>
+              </a:ext>
+            </a:extLst>
+          </p:cNvPr>
+          <p:cNvSpPr/>
+          <p:nvPr/>
+        </p:nvSpPr>
+        <p:spPr>
+          <a:xfrm>
+            <a:off x="8245644" y="4800600"/>
+            <a:ext cx="2804948" cy="1371600"/>
+          </a:xfrm>
+          <a:prstGeom prst="ellipse">
+            <a:avLst/>
+          </a:prstGeom>
+          <a:ln>
+            <a:solidFill>
+              <a:srgbClr val="002060"/>
+            </a:solidFill>
+          </a:ln>
+        </p:spPr>
+        <p:style>
+          <a:lnRef idx="2">
+            <a:schemeClr val="accent6"/>
+          </a:lnRef>
+          <a:fillRef idx="1">
+            <a:schemeClr val="lt1"/>
+          </a:fillRef>
+          <a:effectRef idx="0">
+            <a:schemeClr val="accent6"/>
+          </a:effectRef>
+          <a:fontRef idx="minor">
+            <a:schemeClr val="dk1"/>
+          </a:fontRef>
+        </p:style>
+        <p:txBody>
+          <a:bodyPr rtlCol="0" anchor="ctr"/>
+          <a:lstStyle/>
+          <a:p>
+            <a:pPr algn="ctr"/>
+            <a:r>
+              <a:rPr lang="en-US" dirty="0"/>
+              <a:t>Disque C</a:t>
+            </a:r>
+          </a:p>
+          <a:p>
+            <a:pPr algn="ctr"/>
+            <a:r>
+              <a:rPr lang="en-US" dirty="0"/>
+              <a:t>D1</a:t>
+            </a:r>
+          </a:p>
+          <a:p>
+            <a:pPr algn="ctr"/>
+            <a:r>
+              <a:rPr lang="en-US" dirty="0"/>
+              <a:t>D2</a:t>
+            </a:r>
+          </a:p>
+          <a:p>
+            <a:pPr algn="ctr"/>
+            <a:r>
+              <a:rPr lang="en-US" dirty="0"/>
+              <a:t>P3</a:t>
+            </a:r>
+            <a:endParaRPr lang="fr-CA" dirty="0"/>
+          </a:p>
+        </p:txBody>
+      </p:sp>
+      <p:sp>
+        <p:nvSpPr>
+          <p:cNvPr id="8" name="Ellipse 7">
+            <a:extLst>
+              <a:ext uri="{FF2B5EF4-FFF2-40B4-BE49-F238E27FC236}">
+                <a16:creationId xmlns:a16="http://schemas.microsoft.com/office/drawing/2014/main" id="{43F42F83-0B26-85E7-CF33-ABB4565FFD8C}"/>
+              </a:ext>
+            </a:extLst>
+          </p:cNvPr>
+          <p:cNvSpPr/>
+          <p:nvPr/>
+        </p:nvSpPr>
+        <p:spPr>
+          <a:xfrm>
+            <a:off x="2092224" y="4795152"/>
+            <a:ext cx="2804948" cy="1371600"/>
+          </a:xfrm>
+          <a:prstGeom prst="ellipse">
+            <a:avLst/>
+          </a:prstGeom>
+          <a:ln>
+            <a:solidFill>
+              <a:srgbClr val="002060"/>
+            </a:solidFill>
+          </a:ln>
+        </p:spPr>
+        <p:style>
+          <a:lnRef idx="2">
+            <a:schemeClr val="accent6"/>
+          </a:lnRef>
+          <a:fillRef idx="1">
+            <a:schemeClr val="lt1"/>
+          </a:fillRef>
+          <a:effectRef idx="0">
+            <a:schemeClr val="accent6"/>
+          </a:effectRef>
+          <a:fontRef idx="minor">
+            <a:schemeClr val="dk1"/>
+          </a:fontRef>
+        </p:style>
+        <p:txBody>
+          <a:bodyPr rtlCol="0" anchor="ctr"/>
+          <a:lstStyle/>
+          <a:p>
+            <a:pPr algn="ctr"/>
+            <a:r>
+              <a:rPr lang="en-US" dirty="0"/>
+              <a:t>Disque A</a:t>
+            </a:r>
+          </a:p>
+          <a:p>
+            <a:pPr algn="ctr"/>
+            <a:r>
+              <a:rPr lang="en-US" dirty="0"/>
+              <a:t>D1</a:t>
+            </a:r>
+          </a:p>
+          <a:p>
+            <a:pPr algn="ctr"/>
+            <a:r>
+              <a:rPr lang="en-US" dirty="0"/>
+              <a:t>P2</a:t>
+            </a:r>
+          </a:p>
+          <a:p>
+            <a:pPr algn="ctr"/>
+            <a:r>
+              <a:rPr lang="en-US" dirty="0"/>
+              <a:t>D3</a:t>
+            </a:r>
+            <a:endParaRPr lang="fr-CA" dirty="0"/>
+          </a:p>
+        </p:txBody>
+      </p:sp>
+    </p:spTree>
+    <p:extLst>
+      <p:ext uri="{BB962C8B-B14F-4D97-AF65-F5344CB8AC3E}">
+        <p14:creationId xmlns:p14="http://schemas.microsoft.com/office/powerpoint/2010/main" val="3121081107"/>
+      </p:ext>
+    </p:extLst>
+  </p:cSld>
+  <p:clrMapOvr>
+    <a:masterClrMapping/>
+  </p:clrMapOvr>
+</p:sld>
+</file>
+
+<file path=ppt/slides/slide6.xml><?xml version="1.0" encoding="utf-8"?>
 <p:sld xmlns:a="http://schemas.openxmlformats.org/drawingml/2006/main" xmlns:r="http://schemas.openxmlformats.org/officeDocument/2006/relationships" xmlns:p="http://schemas.openxmlformats.org/presentationml/2006/main">
   <p:cSld>
     <p:spTree>
@@ -6623,7 +7670,7 @@
 </p:sld>
 </file>
 
-<file path=ppt/slides/slide5.xml><?xml version="1.0" encoding="utf-8"?>
+<file path=ppt/slides/slide7.xml><?xml version="1.0" encoding="utf-8"?>
 <p:sld xmlns:a="http://schemas.openxmlformats.org/drawingml/2006/main" xmlns:r="http://schemas.openxmlformats.org/officeDocument/2006/relationships" xmlns:p="http://schemas.openxmlformats.org/presentationml/2006/main">
   <p:cSld>
     <p:spTree>
@@ -6867,7 +7914,7 @@
 </p:sld>
 </file>
 
-<file path=ppt/slides/slide6.xml><?xml version="1.0" encoding="utf-8"?>
+<file path=ppt/slides/slide8.xml><?xml version="1.0" encoding="utf-8"?>
 <p:sld xmlns:a="http://schemas.openxmlformats.org/drawingml/2006/main" xmlns:r="http://schemas.openxmlformats.org/officeDocument/2006/relationships" xmlns:p="http://schemas.openxmlformats.org/presentationml/2006/main">
   <p:cSld>
     <p:spTree>
@@ -7034,6 +8081,183 @@
     <p:extLst>
       <p:ext uri="{BB962C8B-B14F-4D97-AF65-F5344CB8AC3E}">
         <p14:creationId xmlns:p14="http://schemas.microsoft.com/office/powerpoint/2010/main" val="122772299"/>
+      </p:ext>
+    </p:extLst>
+  </p:cSld>
+  <p:clrMapOvr>
+    <a:masterClrMapping/>
+  </p:clrMapOvr>
+</p:sld>
+</file>
+
+<file path=ppt/slides/slide9.xml><?xml version="1.0" encoding="utf-8"?>
+<p:sld xmlns:a="http://schemas.openxmlformats.org/drawingml/2006/main" xmlns:r="http://schemas.openxmlformats.org/officeDocument/2006/relationships" xmlns:p="http://schemas.openxmlformats.org/presentationml/2006/main">
+  <p:cSld>
+    <p:spTree>
+      <p:nvGrpSpPr>
+        <p:cNvPr id="1" name="">
+          <a:extLst>
+            <a:ext uri="{FF2B5EF4-FFF2-40B4-BE49-F238E27FC236}">
+              <a16:creationId xmlns:a16="http://schemas.microsoft.com/office/drawing/2014/main" id="{7A4D975A-8CC3-F4BA-24B6-486225930843}"/>
+            </a:ext>
+          </a:extLst>
+        </p:cNvPr>
+        <p:cNvGrpSpPr/>
+        <p:nvPr/>
+      </p:nvGrpSpPr>
+      <p:grpSpPr>
+        <a:xfrm>
+          <a:off x="0" y="0"/>
+          <a:ext cx="0" cy="0"/>
+          <a:chOff x="0" y="0"/>
+          <a:chExt cx="0" cy="0"/>
+        </a:xfrm>
+      </p:grpSpPr>
+      <p:pic>
+        <p:nvPicPr>
+          <p:cNvPr id="4" name="Picture 3">
+            <a:extLst>
+              <a:ext uri="{FF2B5EF4-FFF2-40B4-BE49-F238E27FC236}">
+                <a16:creationId xmlns:a16="http://schemas.microsoft.com/office/drawing/2014/main" id="{CF0CB90F-FAB2-2F59-F7C9-9DE8540DC2D2}"/>
+              </a:ext>
+            </a:extLst>
+          </p:cNvPr>
+          <p:cNvPicPr>
+            <a:picLocks noChangeAspect="1"/>
+          </p:cNvPicPr>
+          <p:nvPr/>
+        </p:nvPicPr>
+        <p:blipFill>
+          <a:blip r:embed="rId2">
+            <a:alphaModFix amt="15000"/>
+          </a:blip>
+          <a:srcRect t="7098" b="2176"/>
+          <a:stretch>
+            <a:fillRect/>
+          </a:stretch>
+        </p:blipFill>
+        <p:spPr>
+          <a:xfrm>
+            <a:off x="20" y="10"/>
+            <a:ext cx="12191979" cy="6857990"/>
+          </a:xfrm>
+          <a:prstGeom prst="rect">
+            <a:avLst/>
+          </a:prstGeom>
+        </p:spPr>
+      </p:pic>
+      <p:sp>
+        <p:nvSpPr>
+          <p:cNvPr id="2" name="Title 1">
+            <a:extLst>
+              <a:ext uri="{FF2B5EF4-FFF2-40B4-BE49-F238E27FC236}">
+                <a16:creationId xmlns:a16="http://schemas.microsoft.com/office/drawing/2014/main" id="{DCBBE23D-0B95-0C10-EF51-C49A3B358482}"/>
+              </a:ext>
+            </a:extLst>
+          </p:cNvPr>
+          <p:cNvSpPr>
+            <a:spLocks noGrp="1"/>
+          </p:cNvSpPr>
+          <p:nvPr>
+            <p:ph type="title"/>
+          </p:nvPr>
+        </p:nvSpPr>
+        <p:spPr>
+          <a:xfrm>
+            <a:off x="1653547" y="228600"/>
+            <a:ext cx="8884906" cy="1371600"/>
+          </a:xfrm>
+        </p:spPr>
+        <p:txBody>
+          <a:bodyPr>
+            <a:normAutofit fontScale="90000"/>
+          </a:bodyPr>
+          <a:lstStyle/>
+          <a:p>
+            <a:pPr algn="ctr"/>
+            <a:r>
+              <a:rPr lang="fr-FR" sz="5400" b="1" noProof="0" dirty="0"/>
+              <a:t>Raid n’est pas une sauvegarde</a:t>
+            </a:r>
+          </a:p>
+        </p:txBody>
+      </p:sp>
+      <p:sp>
+        <p:nvSpPr>
+          <p:cNvPr id="5" name="Content Placeholder 4">
+            <a:extLst>
+              <a:ext uri="{FF2B5EF4-FFF2-40B4-BE49-F238E27FC236}">
+                <a16:creationId xmlns:a16="http://schemas.microsoft.com/office/drawing/2014/main" id="{6F3E5169-84D5-DE83-3226-EAF70133012C}"/>
+              </a:ext>
+            </a:extLst>
+          </p:cNvPr>
+          <p:cNvSpPr>
+            <a:spLocks noGrp="1"/>
+          </p:cNvSpPr>
+          <p:nvPr>
+            <p:ph idx="1"/>
+          </p:nvPr>
+        </p:nvSpPr>
+        <p:spPr/>
+        <p:txBody>
+          <a:bodyPr/>
+          <a:lstStyle/>
+          <a:p>
+            <a:r>
+              <a:rPr lang="fr-FR" noProof="0" dirty="0"/>
+              <a:t>Pourquoi cela ne remplace pas une sauvegarde</a:t>
+            </a:r>
+          </a:p>
+          <a:p>
+            <a:endParaRPr lang="fr-FR" dirty="0"/>
+          </a:p>
+          <a:p>
+            <a:r>
+              <a:rPr lang="fr-FR" noProof="0" dirty="0"/>
+              <a:t>1 exemple ou RAID aide </a:t>
+            </a:r>
+          </a:p>
+          <a:p>
+            <a:r>
+              <a:rPr lang="fr-FR" dirty="0"/>
+              <a:t>1 exemple ou RAID n’est pas suffisant.</a:t>
+            </a:r>
+            <a:endParaRPr lang="fr-FR" noProof="0" dirty="0"/>
+          </a:p>
+        </p:txBody>
+      </p:sp>
+      <p:sp>
+        <p:nvSpPr>
+          <p:cNvPr id="6" name="Text Placeholder 5">
+            <a:extLst>
+              <a:ext uri="{FF2B5EF4-FFF2-40B4-BE49-F238E27FC236}">
+                <a16:creationId xmlns:a16="http://schemas.microsoft.com/office/drawing/2014/main" id="{E9854642-BC77-97DF-8A66-2F1B0B2EE474}"/>
+              </a:ext>
+            </a:extLst>
+          </p:cNvPr>
+          <p:cNvSpPr>
+            <a:spLocks noGrp="1"/>
+          </p:cNvSpPr>
+          <p:nvPr>
+            <p:ph type="body" sz="half" idx="2"/>
+          </p:nvPr>
+        </p:nvSpPr>
+        <p:spPr/>
+        <p:txBody>
+          <a:bodyPr/>
+          <a:lstStyle/>
+          <a:p>
+            <a:r>
+              <a:rPr lang="fr-FR" noProof="0" dirty="0"/>
+              <a:t>Minimum : 4 disques (nombre pair)</a:t>
+            </a:r>
+          </a:p>
+        </p:txBody>
+      </p:sp>
+    </p:spTree>
+    <p:extLst>
+      <p:ext uri="{BB962C8B-B14F-4D97-AF65-F5344CB8AC3E}">
+        <p14:creationId xmlns:p14="http://schemas.microsoft.com/office/powerpoint/2010/main" val="4242267627"/>
       </p:ext>
     </p:extLst>
   </p:cSld>

--- a/Outils et Materiels/Cartes éclair sur le RAID.pptx
+++ b/Outils et Materiels/Cartes éclair sur le RAID.pptx
@@ -6,14 +6,12 @@
   </p:sldMasterIdLst>
   <p:sldIdLst>
     <p:sldId id="256" r:id="rId2"/>
-    <p:sldId id="264" r:id="rId3"/>
-    <p:sldId id="258" r:id="rId4"/>
-    <p:sldId id="265" r:id="rId5"/>
-    <p:sldId id="266" r:id="rId6"/>
-    <p:sldId id="260" r:id="rId7"/>
-    <p:sldId id="261" r:id="rId8"/>
-    <p:sldId id="262" r:id="rId9"/>
-    <p:sldId id="263" r:id="rId10"/>
+    <p:sldId id="258" r:id="rId3"/>
+    <p:sldId id="265" r:id="rId4"/>
+    <p:sldId id="266" r:id="rId5"/>
+    <p:sldId id="267" r:id="rId6"/>
+    <p:sldId id="268" r:id="rId7"/>
+    <p:sldId id="263" r:id="rId8"/>
   </p:sldIdLst>
   <p:sldSz cx="12192000" cy="6858000"/>
   <p:notesSz cx="6858000" cy="9144000"/>
@@ -333,7 +331,7 @@
           <a:p>
             <a:fld id="{E80C50CD-E178-4744-9B35-B2F624D6C5E9}" type="datetimeFigureOut">
               <a:rPr lang="en-US" smtClean="0"/>
-              <a:t>9/13/2026</a:t>
+              <a:t>9/14/2026</a:t>
             </a:fld>
             <a:endParaRPr lang="en-US"/>
           </a:p>
@@ -375,7 +373,7 @@
           <a:p>
             <a:fld id="{148CC95F-0247-41B6-91CF-DC97C76A7088}" type="slidenum">
               <a:rPr lang="en-US" smtClean="0"/>
-              <a:t>‹n°›</a:t>
+              <a:t>‹#›</a:t>
             </a:fld>
             <a:endParaRPr lang="en-US"/>
           </a:p>
@@ -625,7 +623,7 @@
             <a:fld id="{E80C50CD-E178-4744-9B35-B2F624D6C5E9}" type="datetimeFigureOut">
               <a:rPr lang="en-US" smtClean="0"/>
               <a:pPr/>
-              <a:t>9/13/2026</a:t>
+              <a:t>9/14/2026</a:t>
             </a:fld>
             <a:endParaRPr lang="en-US"/>
           </a:p>
@@ -668,7 +666,7 @@
             <a:fld id="{148CC95F-0247-41B6-91CF-DC97C76A7088}" type="slidenum">
               <a:rPr lang="en-US" smtClean="0"/>
               <a:pPr/>
-              <a:t>‹n°›</a:t>
+              <a:t>‹#›</a:t>
             </a:fld>
             <a:endParaRPr lang="en-US"/>
           </a:p>
@@ -886,7 +884,7 @@
             <a:fld id="{E80C50CD-E178-4744-9B35-B2F624D6C5E9}" type="datetimeFigureOut">
               <a:rPr lang="en-US" smtClean="0"/>
               <a:pPr/>
-              <a:t>9/13/2026</a:t>
+              <a:t>9/14/2026</a:t>
             </a:fld>
             <a:endParaRPr lang="en-US"/>
           </a:p>
@@ -929,7 +927,7 @@
             <a:fld id="{148CC95F-0247-41B6-91CF-DC97C76A7088}" type="slidenum">
               <a:rPr lang="en-US" smtClean="0"/>
               <a:pPr/>
-              <a:t>‹n°›</a:t>
+              <a:t>‹#›</a:t>
             </a:fld>
             <a:endParaRPr lang="en-US"/>
           </a:p>
@@ -1357,7 +1355,7 @@
             <a:fld id="{E80C50CD-E178-4744-9B35-B2F624D6C5E9}" type="datetimeFigureOut">
               <a:rPr lang="en-US" smtClean="0"/>
               <a:pPr/>
-              <a:t>9/13/2026</a:t>
+              <a:t>9/14/2026</a:t>
             </a:fld>
             <a:endParaRPr lang="en-US"/>
           </a:p>
@@ -1400,7 +1398,7 @@
             <a:fld id="{148CC95F-0247-41B6-91CF-DC97C76A7088}" type="slidenum">
               <a:rPr lang="en-US" smtClean="0"/>
               <a:pPr/>
-              <a:t>‹n°›</a:t>
+              <a:t>‹#›</a:t>
             </a:fld>
             <a:endParaRPr lang="en-US"/>
           </a:p>
@@ -1539,7 +1537,7 @@
             <a:fld id="{E80C50CD-E178-4744-9B35-B2F624D6C5E9}" type="datetimeFigureOut">
               <a:rPr lang="en-US" smtClean="0"/>
               <a:pPr/>
-              <a:t>9/13/2026</a:t>
+              <a:t>9/14/2026</a:t>
             </a:fld>
             <a:endParaRPr lang="en-US"/>
           </a:p>
@@ -1582,7 +1580,7 @@
             <a:fld id="{148CC95F-0247-41B6-91CF-DC97C76A7088}" type="slidenum">
               <a:rPr lang="en-US" smtClean="0"/>
               <a:pPr/>
-              <a:t>‹n°›</a:t>
+              <a:t>‹#›</a:t>
             </a:fld>
             <a:endParaRPr lang="en-US"/>
           </a:p>
@@ -2117,7 +2115,7 @@
             <a:fld id="{E80C50CD-E178-4744-9B35-B2F624D6C5E9}" type="datetimeFigureOut">
               <a:rPr lang="en-US" smtClean="0"/>
               <a:pPr/>
-              <a:t>9/13/2026</a:t>
+              <a:t>9/14/2026</a:t>
             </a:fld>
             <a:endParaRPr lang="en-US"/>
           </a:p>
@@ -2160,7 +2158,7 @@
             <a:fld id="{148CC95F-0247-41B6-91CF-DC97C76A7088}" type="slidenum">
               <a:rPr lang="en-US" smtClean="0"/>
               <a:pPr/>
-              <a:t>‹n°›</a:t>
+              <a:t>‹#›</a:t>
             </a:fld>
             <a:endParaRPr lang="en-US"/>
           </a:p>
@@ -2451,7 +2449,7 @@
             <a:fld id="{E80C50CD-E178-4744-9B35-B2F624D6C5E9}" type="datetimeFigureOut">
               <a:rPr lang="en-US" smtClean="0"/>
               <a:pPr/>
-              <a:t>9/13/2026</a:t>
+              <a:t>9/14/2026</a:t>
             </a:fld>
             <a:endParaRPr lang="en-US"/>
           </a:p>
@@ -2494,7 +2492,7 @@
             <a:fld id="{148CC95F-0247-41B6-91CF-DC97C76A7088}" type="slidenum">
               <a:rPr lang="en-US" smtClean="0"/>
               <a:pPr/>
-              <a:t>‹n°›</a:t>
+              <a:t>‹#›</a:t>
             </a:fld>
             <a:endParaRPr lang="en-US"/>
           </a:p>
@@ -2627,7 +2625,7 @@
           <a:p>
             <a:fld id="{E80C50CD-E178-4744-9B35-B2F624D6C5E9}" type="datetimeFigureOut">
               <a:rPr lang="en-US" smtClean="0"/>
-              <a:t>9/13/2026</a:t>
+              <a:t>9/14/2026</a:t>
             </a:fld>
             <a:endParaRPr lang="en-US"/>
           </a:p>
@@ -2669,7 +2667,7 @@
           <a:p>
             <a:fld id="{148CC95F-0247-41B6-91CF-DC97C76A7088}" type="slidenum">
               <a:rPr lang="en-US" smtClean="0"/>
-              <a:t>‹n°›</a:t>
+              <a:t>‹#›</a:t>
             </a:fld>
             <a:endParaRPr lang="en-US"/>
           </a:p>
@@ -2807,7 +2805,7 @@
           <a:p>
             <a:fld id="{E80C50CD-E178-4744-9B35-B2F624D6C5E9}" type="datetimeFigureOut">
               <a:rPr lang="en-US" smtClean="0"/>
-              <a:t>9/13/2026</a:t>
+              <a:t>9/14/2026</a:t>
             </a:fld>
             <a:endParaRPr lang="en-US"/>
           </a:p>
@@ -2849,7 +2847,7 @@
           <a:p>
             <a:fld id="{148CC95F-0247-41B6-91CF-DC97C76A7088}" type="slidenum">
               <a:rPr lang="en-US" smtClean="0"/>
-              <a:t>‹n°›</a:t>
+              <a:t>‹#›</a:t>
             </a:fld>
             <a:endParaRPr lang="en-US"/>
           </a:p>
@@ -2977,7 +2975,7 @@
           <a:p>
             <a:fld id="{E80C50CD-E178-4744-9B35-B2F624D6C5E9}" type="datetimeFigureOut">
               <a:rPr lang="en-US" smtClean="0"/>
-              <a:t>9/13/2026</a:t>
+              <a:t>9/14/2026</a:t>
             </a:fld>
             <a:endParaRPr lang="en-US"/>
           </a:p>
@@ -3019,7 +3017,7 @@
           <a:p>
             <a:fld id="{148CC95F-0247-41B6-91CF-DC97C76A7088}" type="slidenum">
               <a:rPr lang="en-US" smtClean="0"/>
-              <a:t>‹n°›</a:t>
+              <a:t>‹#›</a:t>
             </a:fld>
             <a:endParaRPr lang="en-US"/>
           </a:p>
@@ -3234,7 +3232,7 @@
           <a:p>
             <a:fld id="{E80C50CD-E178-4744-9B35-B2F624D6C5E9}" type="datetimeFigureOut">
               <a:rPr lang="en-US" smtClean="0"/>
-              <a:t>9/13/2026</a:t>
+              <a:t>9/14/2026</a:t>
             </a:fld>
             <a:endParaRPr lang="en-US"/>
           </a:p>
@@ -3276,7 +3274,7 @@
           <a:p>
             <a:fld id="{148CC95F-0247-41B6-91CF-DC97C76A7088}" type="slidenum">
               <a:rPr lang="en-US" smtClean="0"/>
-              <a:t>‹n°›</a:t>
+              <a:t>‹#›</a:t>
             </a:fld>
             <a:endParaRPr lang="en-US"/>
           </a:p>
@@ -3526,7 +3524,7 @@
           <a:p>
             <a:fld id="{E80C50CD-E178-4744-9B35-B2F624D6C5E9}" type="datetimeFigureOut">
               <a:rPr lang="en-US" smtClean="0"/>
-              <a:t>9/13/2026</a:t>
+              <a:t>9/14/2026</a:t>
             </a:fld>
             <a:endParaRPr lang="en-US"/>
           </a:p>
@@ -3568,7 +3566,7 @@
           <a:p>
             <a:fld id="{148CC95F-0247-41B6-91CF-DC97C76A7088}" type="slidenum">
               <a:rPr lang="en-US" smtClean="0"/>
-              <a:t>‹n°›</a:t>
+              <a:t>‹#›</a:t>
             </a:fld>
             <a:endParaRPr lang="en-US"/>
           </a:p>
@@ -3956,7 +3954,7 @@
           <a:p>
             <a:fld id="{E80C50CD-E178-4744-9B35-B2F624D6C5E9}" type="datetimeFigureOut">
               <a:rPr lang="en-US" smtClean="0"/>
-              <a:t>9/13/2026</a:t>
+              <a:t>9/14/2026</a:t>
             </a:fld>
             <a:endParaRPr lang="en-US"/>
           </a:p>
@@ -3998,7 +3996,7 @@
           <a:p>
             <a:fld id="{148CC95F-0247-41B6-91CF-DC97C76A7088}" type="slidenum">
               <a:rPr lang="en-US" smtClean="0"/>
-              <a:t>‹n°›</a:t>
+              <a:t>‹#›</a:t>
             </a:fld>
             <a:endParaRPr lang="en-US"/>
           </a:p>
@@ -4074,7 +4072,7 @@
           <a:p>
             <a:fld id="{E80C50CD-E178-4744-9B35-B2F624D6C5E9}" type="datetimeFigureOut">
               <a:rPr lang="en-US" smtClean="0"/>
-              <a:t>9/13/2026</a:t>
+              <a:t>9/14/2026</a:t>
             </a:fld>
             <a:endParaRPr lang="en-US"/>
           </a:p>
@@ -4116,7 +4114,7 @@
           <a:p>
             <a:fld id="{148CC95F-0247-41B6-91CF-DC97C76A7088}" type="slidenum">
               <a:rPr lang="en-US" smtClean="0"/>
-              <a:t>‹n°›</a:t>
+              <a:t>‹#›</a:t>
             </a:fld>
             <a:endParaRPr lang="en-US"/>
           </a:p>
@@ -4169,7 +4167,7 @@
           <a:p>
             <a:fld id="{E80C50CD-E178-4744-9B35-B2F624D6C5E9}" type="datetimeFigureOut">
               <a:rPr lang="en-US" smtClean="0"/>
-              <a:t>9/13/2026</a:t>
+              <a:t>9/14/2026</a:t>
             </a:fld>
             <a:endParaRPr lang="en-US"/>
           </a:p>
@@ -4211,7 +4209,7 @@
           <a:p>
             <a:fld id="{148CC95F-0247-41B6-91CF-DC97C76A7088}" type="slidenum">
               <a:rPr lang="en-US" smtClean="0"/>
-              <a:t>‹n°›</a:t>
+              <a:t>‹#›</a:t>
             </a:fld>
             <a:endParaRPr lang="en-US"/>
           </a:p>
@@ -4452,7 +4450,7 @@
           <a:p>
             <a:fld id="{E80C50CD-E178-4744-9B35-B2F624D6C5E9}" type="datetimeFigureOut">
               <a:rPr lang="en-US" smtClean="0"/>
-              <a:t>9/13/2026</a:t>
+              <a:t>9/14/2026</a:t>
             </a:fld>
             <a:endParaRPr lang="en-US"/>
           </a:p>
@@ -4494,7 +4492,7 @@
           <a:p>
             <a:fld id="{148CC95F-0247-41B6-91CF-DC97C76A7088}" type="slidenum">
               <a:rPr lang="en-US" smtClean="0"/>
-              <a:t>‹n°›</a:t>
+              <a:t>‹#›</a:t>
             </a:fld>
             <a:endParaRPr lang="en-US"/>
           </a:p>
@@ -4743,7 +4741,7 @@
           <a:p>
             <a:fld id="{E80C50CD-E178-4744-9B35-B2F624D6C5E9}" type="datetimeFigureOut">
               <a:rPr lang="en-US" smtClean="0"/>
-              <a:t>9/13/2026</a:t>
+              <a:t>9/14/2026</a:t>
             </a:fld>
             <a:endParaRPr lang="en-US"/>
           </a:p>
@@ -4795,7 +4793,7 @@
           <a:p>
             <a:fld id="{148CC95F-0247-41B6-91CF-DC97C76A7088}" type="slidenum">
               <a:rPr lang="en-US" smtClean="0"/>
-              <a:t>‹n°›</a:t>
+              <a:t>‹#›</a:t>
             </a:fld>
             <a:endParaRPr lang="en-US"/>
           </a:p>
@@ -4975,7 +4973,7 @@
             <a:fld id="{E80C50CD-E178-4744-9B35-B2F624D6C5E9}" type="datetimeFigureOut">
               <a:rPr lang="en-US" smtClean="0"/>
               <a:pPr/>
-              <a:t>9/13/2026</a:t>
+              <a:t>9/14/2026</a:t>
             </a:fld>
             <a:endParaRPr lang="en-US"/>
           </a:p>
@@ -5070,7 +5068,7 @@
             <a:fld id="{148CC95F-0247-41B6-91CF-DC97C76A7088}" type="slidenum">
               <a:rPr lang="en-US" smtClean="0"/>
               <a:pPr/>
-              <a:t>‹n°›</a:t>
+              <a:t>‹#›</a:t>
             </a:fld>
             <a:endParaRPr lang="en-US"/>
           </a:p>
@@ -5798,7 +5796,7 @@
           <a:p>
             <a:r>
               <a:rPr lang="fr-FR" noProof="0" dirty="0"/>
-              <a:t>Cartes éclair sur le RAID</a:t>
+              <a:t>Cartes éclair sur RAID</a:t>
             </a:r>
           </a:p>
         </p:txBody>
@@ -5839,17 +5837,6 @@
             <a:r>
               <a:rPr lang="fr-FR" sz="1800" noProof="0" dirty="0"/>
               <a:t>Louis Gauvreau</a:t>
-            </a:r>
-          </a:p>
-          <a:p>
-            <a:pPr>
-              <a:lnSpc>
-                <a:spcPct val="90000"/>
-              </a:lnSpc>
-            </a:pPr>
-            <a:r>
-              <a:rPr lang="fr-FR" sz="1800" noProof="0" dirty="0"/>
-              <a:t>1957480</a:t>
             </a:r>
           </a:p>
         </p:txBody>
@@ -5899,305 +5886,6 @@
 </file>
 
 <file path=ppt/slides/slide2.xml><?xml version="1.0" encoding="utf-8"?>
-<p:sld xmlns:a="http://schemas.openxmlformats.org/drawingml/2006/main" xmlns:r="http://schemas.openxmlformats.org/officeDocument/2006/relationships" xmlns:p="http://schemas.openxmlformats.org/presentationml/2006/main">
-  <p:cSld>
-    <p:spTree>
-      <p:nvGrpSpPr>
-        <p:cNvPr id="1" name="">
-          <a:extLst>
-            <a:ext uri="{FF2B5EF4-FFF2-40B4-BE49-F238E27FC236}">
-              <a16:creationId xmlns:a16="http://schemas.microsoft.com/office/drawing/2014/main" id="{D9588298-0D42-B5B9-318A-16FB63A0D33D}"/>
-            </a:ext>
-          </a:extLst>
-        </p:cNvPr>
-        <p:cNvGrpSpPr/>
-        <p:nvPr/>
-      </p:nvGrpSpPr>
-      <p:grpSpPr>
-        <a:xfrm>
-          <a:off x="0" y="0"/>
-          <a:ext cx="0" cy="0"/>
-          <a:chOff x="0" y="0"/>
-          <a:chExt cx="0" cy="0"/>
-        </a:xfrm>
-      </p:grpSpPr>
-      <p:pic>
-        <p:nvPicPr>
-          <p:cNvPr id="4" name="Picture 3">
-            <a:extLst>
-              <a:ext uri="{FF2B5EF4-FFF2-40B4-BE49-F238E27FC236}">
-                <a16:creationId xmlns:a16="http://schemas.microsoft.com/office/drawing/2014/main" id="{C1A79A32-35F2-99D7-DC97-9A87A1ABCF54}"/>
-              </a:ext>
-            </a:extLst>
-          </p:cNvPr>
-          <p:cNvPicPr>
-            <a:picLocks noChangeAspect="1"/>
-          </p:cNvPicPr>
-          <p:nvPr/>
-        </p:nvPicPr>
-        <p:blipFill>
-          <a:blip r:embed="rId2">
-            <a:alphaModFix amt="15000"/>
-          </a:blip>
-          <a:srcRect t="7098" b="2176"/>
-          <a:stretch>
-            <a:fillRect/>
-          </a:stretch>
-        </p:blipFill>
-        <p:spPr>
-          <a:xfrm>
-            <a:off x="20" y="10"/>
-            <a:ext cx="12191979" cy="6857990"/>
-          </a:xfrm>
-          <a:prstGeom prst="rect">
-            <a:avLst/>
-          </a:prstGeom>
-        </p:spPr>
-      </p:pic>
-      <p:sp>
-        <p:nvSpPr>
-          <p:cNvPr id="2" name="Title 1">
-            <a:extLst>
-              <a:ext uri="{FF2B5EF4-FFF2-40B4-BE49-F238E27FC236}">
-                <a16:creationId xmlns:a16="http://schemas.microsoft.com/office/drawing/2014/main" id="{2A7DFE18-DBB8-8ABF-A386-1AB7B212FFCE}"/>
-              </a:ext>
-            </a:extLst>
-          </p:cNvPr>
-          <p:cNvSpPr>
-            <a:spLocks noGrp="1"/>
-          </p:cNvSpPr>
-          <p:nvPr>
-            <p:ph type="title"/>
-          </p:nvPr>
-        </p:nvSpPr>
-        <p:spPr>
-          <a:xfrm>
-            <a:off x="1141410" y="114305"/>
-            <a:ext cx="3549121" cy="1371600"/>
-          </a:xfrm>
-        </p:spPr>
-        <p:txBody>
-          <a:bodyPr>
-            <a:normAutofit/>
-          </a:bodyPr>
-          <a:lstStyle/>
-          <a:p>
-            <a:pPr algn="ctr"/>
-            <a:r>
-              <a:rPr lang="fr-FR" sz="5400" b="1" dirty="0"/>
-              <a:t>Exemple</a:t>
-            </a:r>
-            <a:endParaRPr lang="fr-FR" sz="5400" b="1" noProof="0" dirty="0"/>
-          </a:p>
-        </p:txBody>
-      </p:sp>
-      <p:sp>
-        <p:nvSpPr>
-          <p:cNvPr id="5" name="Content Placeholder 4">
-            <a:extLst>
-              <a:ext uri="{FF2B5EF4-FFF2-40B4-BE49-F238E27FC236}">
-                <a16:creationId xmlns:a16="http://schemas.microsoft.com/office/drawing/2014/main" id="{0503E4BA-3352-92B4-0DFC-CB4EC11C0A70}"/>
-              </a:ext>
-            </a:extLst>
-          </p:cNvPr>
-          <p:cNvSpPr>
-            <a:spLocks noGrp="1"/>
-          </p:cNvSpPr>
-          <p:nvPr>
-            <p:ph idx="1"/>
-          </p:nvPr>
-        </p:nvSpPr>
-        <p:spPr/>
-        <p:txBody>
-          <a:bodyPr/>
-          <a:lstStyle/>
-          <a:p>
-            <a:r>
-              <a:rPr lang="fr-FR" u="sng" dirty="0"/>
-              <a:t>Ce qui se produit lorsqu’1 ou + disque en panne</a:t>
-            </a:r>
-          </a:p>
-          <a:p>
-            <a:r>
-              <a:rPr lang="fr-FR" u="sng" dirty="0"/>
-              <a:t>1 avantage important</a:t>
-            </a:r>
-          </a:p>
-          <a:p>
-            <a:r>
-              <a:rPr lang="fr-FR" u="sng" noProof="0" dirty="0"/>
-              <a:t>Une limite ou un compromis</a:t>
-            </a:r>
-          </a:p>
-          <a:p>
-            <a:r>
-              <a:rPr lang="fr-FR" u="sng" noProof="0" dirty="0"/>
-              <a:t>Principe général</a:t>
-            </a:r>
-          </a:p>
-          <a:p>
-            <a:r>
-              <a:rPr lang="fr-FR" u="sng" dirty="0"/>
-              <a:t>1 </a:t>
-            </a:r>
-            <a:r>
-              <a:rPr lang="fr-FR" u="sng" dirty="0" err="1"/>
-              <a:t>schema</a:t>
-            </a:r>
-            <a:r>
-              <a:rPr lang="fr-FR" u="sng" dirty="0"/>
-              <a:t> avec organisation de données.</a:t>
-            </a:r>
-            <a:endParaRPr lang="fr-FR" u="sng" noProof="0" dirty="0"/>
-          </a:p>
-        </p:txBody>
-      </p:sp>
-      <p:sp>
-        <p:nvSpPr>
-          <p:cNvPr id="6" name="Text Placeholder 5">
-            <a:extLst>
-              <a:ext uri="{FF2B5EF4-FFF2-40B4-BE49-F238E27FC236}">
-                <a16:creationId xmlns:a16="http://schemas.microsoft.com/office/drawing/2014/main" id="{9B858634-47B1-D6B3-2D59-09E30B358E2A}"/>
-              </a:ext>
-            </a:extLst>
-          </p:cNvPr>
-          <p:cNvSpPr>
-            <a:spLocks noGrp="1"/>
-          </p:cNvSpPr>
-          <p:nvPr>
-            <p:ph type="body" sz="half" idx="2"/>
-          </p:nvPr>
-        </p:nvSpPr>
-        <p:spPr/>
-        <p:txBody>
-          <a:bodyPr/>
-          <a:lstStyle/>
-          <a:p>
-            <a:r>
-              <a:rPr lang="fr-FR" dirty="0"/>
-              <a:t>Nombre min de disque requis</a:t>
-            </a:r>
-          </a:p>
-          <a:p>
-            <a:r>
-              <a:rPr lang="fr-FR" noProof="0" dirty="0"/>
-              <a:t>Capacité utilisable du min de disque avec 2 To chacun</a:t>
-            </a:r>
-          </a:p>
-        </p:txBody>
-      </p:sp>
-      <p:sp>
-        <p:nvSpPr>
-          <p:cNvPr id="3" name="Ellipse 2">
-            <a:extLst>
-              <a:ext uri="{FF2B5EF4-FFF2-40B4-BE49-F238E27FC236}">
-                <a16:creationId xmlns:a16="http://schemas.microsoft.com/office/drawing/2014/main" id="{E2C9A555-64B0-0260-B2E1-B69974AE7714}"/>
-              </a:ext>
-            </a:extLst>
-          </p:cNvPr>
-          <p:cNvSpPr/>
-          <p:nvPr/>
-        </p:nvSpPr>
-        <p:spPr>
-          <a:xfrm>
-            <a:off x="5027416" y="4800600"/>
-            <a:ext cx="2804948" cy="1371600"/>
-          </a:xfrm>
-          <a:prstGeom prst="ellipse">
-            <a:avLst/>
-          </a:prstGeom>
-          <a:ln>
-            <a:solidFill>
-              <a:srgbClr val="002060"/>
-            </a:solidFill>
-          </a:ln>
-        </p:spPr>
-        <p:style>
-          <a:lnRef idx="2">
-            <a:schemeClr val="accent6"/>
-          </a:lnRef>
-          <a:fillRef idx="1">
-            <a:schemeClr val="lt1"/>
-          </a:fillRef>
-          <a:effectRef idx="0">
-            <a:schemeClr val="accent6"/>
-          </a:effectRef>
-          <a:fontRef idx="minor">
-            <a:schemeClr val="dk1"/>
-          </a:fontRef>
-        </p:style>
-        <p:txBody>
-          <a:bodyPr rtlCol="0" anchor="ctr"/>
-          <a:lstStyle/>
-          <a:p>
-            <a:pPr algn="ctr"/>
-            <a:endParaRPr lang="en-US" dirty="0"/>
-          </a:p>
-        </p:txBody>
-      </p:sp>
-      <p:sp>
-        <p:nvSpPr>
-          <p:cNvPr id="10" name="Ellipse 9">
-            <a:extLst>
-              <a:ext uri="{FF2B5EF4-FFF2-40B4-BE49-F238E27FC236}">
-                <a16:creationId xmlns:a16="http://schemas.microsoft.com/office/drawing/2014/main" id="{50D2F08E-F038-E3C3-DA5E-8E3F72B5C3A5}"/>
-              </a:ext>
-            </a:extLst>
-          </p:cNvPr>
-          <p:cNvSpPr/>
-          <p:nvPr/>
-        </p:nvSpPr>
-        <p:spPr>
-          <a:xfrm>
-            <a:off x="8245644" y="4800600"/>
-            <a:ext cx="2804948" cy="1371600"/>
-          </a:xfrm>
-          <a:prstGeom prst="ellipse">
-            <a:avLst/>
-          </a:prstGeom>
-          <a:ln>
-            <a:solidFill>
-              <a:srgbClr val="002060"/>
-            </a:solidFill>
-          </a:ln>
-        </p:spPr>
-        <p:style>
-          <a:lnRef idx="2">
-            <a:schemeClr val="accent6"/>
-          </a:lnRef>
-          <a:fillRef idx="1">
-            <a:schemeClr val="lt1"/>
-          </a:fillRef>
-          <a:effectRef idx="0">
-            <a:schemeClr val="accent6"/>
-          </a:effectRef>
-          <a:fontRef idx="minor">
-            <a:schemeClr val="dk1"/>
-          </a:fontRef>
-        </p:style>
-        <p:txBody>
-          <a:bodyPr rtlCol="0" anchor="ctr"/>
-          <a:lstStyle/>
-          <a:p>
-            <a:pPr algn="ctr"/>
-            <a:endParaRPr lang="fr-CA"/>
-          </a:p>
-        </p:txBody>
-      </p:sp>
-    </p:spTree>
-    <p:extLst>
-      <p:ext uri="{BB962C8B-B14F-4D97-AF65-F5344CB8AC3E}">
-        <p14:creationId xmlns:p14="http://schemas.microsoft.com/office/powerpoint/2010/main" val="1407178413"/>
-      </p:ext>
-    </p:extLst>
-  </p:cSld>
-  <p:clrMapOvr>
-    <a:masterClrMapping/>
-  </p:clrMapOvr>
-</p:sld>
-</file>
-
-<file path=ppt/slides/slide3.xml><?xml version="1.0" encoding="utf-8"?>
 <p:sld xmlns:a="http://schemas.openxmlformats.org/drawingml/2006/main" xmlns:r="http://schemas.openxmlformats.org/officeDocument/2006/relationships" xmlns:p="http://schemas.openxmlformats.org/presentationml/2006/main">
   <p:cSld>
     <p:bg>
@@ -6346,7 +6034,6 @@
               <a:rPr lang="fr-FR" noProof="0" dirty="0"/>
               <a:t>Distribue les fichiers dans tous les disques pour augmenter le nombre de mémoire donnée au processeur en même temps. </a:t>
             </a:r>
-            <a:endParaRPr lang="fr-FR" dirty="0"/>
           </a:p>
           <a:p>
             <a:pPr marL="0" indent="0">
@@ -6391,12 +6078,8 @@
           <a:lstStyle/>
           <a:p>
             <a:r>
-              <a:rPr lang="fr-FR" sz="1400" b="1" dirty="0"/>
-              <a:t>Sécurité</a:t>
-            </a:r>
-            <a:r>
               <a:rPr lang="fr-FR" sz="1400" b="1" noProof="0" dirty="0"/>
-              <a:t> : </a:t>
+              <a:t>Sécurité : </a:t>
             </a:r>
             <a:r>
               <a:rPr lang="fr-FR" sz="1400" noProof="0" dirty="0"/>
@@ -6404,15 +6087,15 @@
             </a:r>
           </a:p>
           <a:p>
-            <a:endParaRPr lang="fr-FR" sz="1400" dirty="0"/>
-          </a:p>
-          <a:p>
-            <a:r>
-              <a:rPr lang="fr-FR" sz="1400" b="1" dirty="0"/>
+            <a:endParaRPr lang="fr-FR" sz="1400" noProof="0" dirty="0"/>
+          </a:p>
+          <a:p>
+            <a:r>
+              <a:rPr lang="fr-FR" sz="1400" b="1" noProof="0" dirty="0"/>
               <a:t>Pour 2 disques de 2 To : </a:t>
             </a:r>
             <a:r>
-              <a:rPr lang="fr-FR" sz="1400" dirty="0"/>
+              <a:rPr lang="fr-FR" sz="1400" noProof="0" dirty="0"/>
               <a:t>la capacité est de 4 To</a:t>
             </a:r>
           </a:p>
@@ -6421,7 +6104,7 @@
           </a:p>
           <a:p>
             <a:r>
-              <a:rPr lang="fr-FR" sz="1400" dirty="0"/>
+              <a:rPr lang="fr-FR" sz="1400" noProof="0" dirty="0"/>
               <a:t>			</a:t>
             </a:r>
             <a:r>
@@ -6481,31 +6164,30 @@
           <a:p>
             <a:pPr algn="ctr"/>
             <a:r>
-              <a:rPr lang="en-US" dirty="0"/>
+              <a:rPr lang="fr-FR" noProof="0" dirty="0"/>
               <a:t>Disque A</a:t>
             </a:r>
           </a:p>
           <a:p>
             <a:pPr algn="ctr"/>
             <a:r>
-              <a:rPr lang="en-US" dirty="0"/>
+              <a:rPr lang="fr-FR" noProof="0" dirty="0"/>
               <a:t>D1</a:t>
             </a:r>
           </a:p>
           <a:p>
             <a:pPr algn="ctr"/>
             <a:r>
-              <a:rPr lang="en-US" dirty="0"/>
+              <a:rPr lang="fr-FR" noProof="0" dirty="0"/>
               <a:t>D3</a:t>
             </a:r>
           </a:p>
           <a:p>
             <a:pPr algn="ctr"/>
             <a:r>
-              <a:rPr lang="en-US" dirty="0"/>
+              <a:rPr lang="fr-FR" noProof="0" dirty="0"/>
               <a:t>D5</a:t>
             </a:r>
-            <a:endParaRPr lang="fr-CA" dirty="0"/>
           </a:p>
         </p:txBody>
       </p:sp>
@@ -6555,31 +6237,30 @@
           <a:p>
             <a:pPr algn="ctr"/>
             <a:r>
-              <a:rPr lang="en-US" dirty="0"/>
+              <a:rPr lang="fr-FR" noProof="0" dirty="0"/>
               <a:t>Disque B</a:t>
             </a:r>
           </a:p>
           <a:p>
             <a:pPr algn="ctr"/>
             <a:r>
-              <a:rPr lang="en-US" dirty="0"/>
+              <a:rPr lang="fr-FR" noProof="0" dirty="0"/>
               <a:t>D2</a:t>
             </a:r>
           </a:p>
           <a:p>
             <a:pPr algn="ctr"/>
             <a:r>
-              <a:rPr lang="en-US" dirty="0"/>
+              <a:rPr lang="fr-FR" noProof="0" dirty="0"/>
               <a:t>D4</a:t>
             </a:r>
           </a:p>
           <a:p>
             <a:pPr algn="ctr"/>
             <a:r>
-              <a:rPr lang="en-US" dirty="0"/>
+              <a:rPr lang="fr-FR" noProof="0" dirty="0"/>
               <a:t>D6</a:t>
             </a:r>
-            <a:endParaRPr lang="fr-CA" dirty="0"/>
           </a:p>
         </p:txBody>
       </p:sp>
@@ -6596,7 +6277,7 @@
 </p:sld>
 </file>
 
-<file path=ppt/slides/slide4.xml><?xml version="1.0" encoding="utf-8"?>
+<file path=ppt/slides/slide3.xml><?xml version="1.0" encoding="utf-8"?>
 <p:sld xmlns:a="http://schemas.openxmlformats.org/drawingml/2006/main" xmlns:r="http://schemas.openxmlformats.org/officeDocument/2006/relationships" xmlns:p="http://schemas.openxmlformats.org/presentationml/2006/main">
   <p:cSld>
     <p:spTree>
@@ -6711,7 +6392,7 @@
           <a:p>
             <a:r>
               <a:rPr lang="fr-FR" noProof="0" dirty="0"/>
-              <a:t>Donne + de sécurité moyennant moins d’espaces</a:t>
+              <a:t>Donne plus de sécurité moyennant moins d’espaces</a:t>
             </a:r>
           </a:p>
           <a:p>
@@ -6719,7 +6400,7 @@
           </a:p>
           <a:p>
             <a:r>
-              <a:rPr lang="fr-FR" dirty="0"/>
+              <a:rPr lang="fr-FR" noProof="0" dirty="0"/>
               <a:t>Les mêmes données sont générées sur les différents disques</a:t>
             </a:r>
           </a:p>
@@ -6766,28 +6447,24 @@
           <a:lstStyle/>
           <a:p>
             <a:r>
-              <a:rPr lang="fr-FR" sz="1400" b="1" dirty="0"/>
+              <a:rPr lang="fr-FR" sz="1400" b="1" noProof="0" dirty="0"/>
               <a:t>Sécurité : </a:t>
             </a:r>
             <a:r>
-              <a:rPr lang="fr-FR" sz="1400" dirty="0"/>
-              <a:t>Peut survivre les pannes si 1 disque en vie</a:t>
-            </a:r>
-            <a:r>
               <a:rPr lang="fr-FR" sz="1400" noProof="0" dirty="0"/>
-              <a:t> 		</a:t>
-            </a:r>
-          </a:p>
-          <a:p>
-            <a:endParaRPr lang="fr-FR" sz="1400" dirty="0"/>
-          </a:p>
-          <a:p>
-            <a:r>
-              <a:rPr lang="fr-FR" sz="1400" b="1" dirty="0"/>
+              <a:t>Peut survivre les pannes si 1 disque en vie 		</a:t>
+            </a:r>
+          </a:p>
+          <a:p>
+            <a:endParaRPr lang="fr-FR" sz="1400" noProof="0" dirty="0"/>
+          </a:p>
+          <a:p>
+            <a:r>
+              <a:rPr lang="fr-FR" sz="1400" b="1" noProof="0" dirty="0"/>
               <a:t>Pour 2 disques de 2 To : </a:t>
             </a:r>
             <a:r>
-              <a:rPr lang="fr-FR" sz="1400" dirty="0"/>
+              <a:rPr lang="fr-FR" sz="1400" noProof="0" dirty="0"/>
               <a:t>la capacité est de 2 To</a:t>
             </a:r>
           </a:p>
@@ -6796,7 +6473,7 @@
           </a:p>
           <a:p>
             <a:r>
-              <a:rPr lang="fr-FR" sz="1400" dirty="0"/>
+              <a:rPr lang="fr-FR" sz="1400" noProof="0" dirty="0"/>
               <a:t>			</a:t>
             </a:r>
             <a:r>
@@ -6856,31 +6533,30 @@
           <a:p>
             <a:pPr algn="ctr"/>
             <a:r>
-              <a:rPr lang="en-US" dirty="0"/>
+              <a:rPr lang="fr-FR" noProof="0" dirty="0"/>
               <a:t>Disque A</a:t>
             </a:r>
           </a:p>
           <a:p>
             <a:pPr algn="ctr"/>
             <a:r>
-              <a:rPr lang="en-US" dirty="0"/>
+              <a:rPr lang="fr-FR" noProof="0" dirty="0"/>
               <a:t>D1</a:t>
             </a:r>
           </a:p>
           <a:p>
             <a:pPr algn="ctr"/>
             <a:r>
-              <a:rPr lang="en-US" dirty="0"/>
+              <a:rPr lang="fr-FR" noProof="0" dirty="0"/>
               <a:t>D2</a:t>
             </a:r>
           </a:p>
           <a:p>
             <a:pPr algn="ctr"/>
             <a:r>
-              <a:rPr lang="en-US" dirty="0"/>
+              <a:rPr lang="fr-FR" noProof="0" dirty="0"/>
               <a:t>D3</a:t>
             </a:r>
-            <a:endParaRPr lang="fr-CA" dirty="0"/>
           </a:p>
         </p:txBody>
       </p:sp>
@@ -6930,31 +6606,30 @@
           <a:p>
             <a:pPr algn="ctr"/>
             <a:r>
-              <a:rPr lang="en-US" dirty="0"/>
+              <a:rPr lang="fr-FR" noProof="0" dirty="0"/>
               <a:t>Disque B</a:t>
             </a:r>
           </a:p>
           <a:p>
             <a:pPr algn="ctr"/>
             <a:r>
-              <a:rPr lang="en-US" dirty="0"/>
+              <a:rPr lang="fr-FR" noProof="0" dirty="0"/>
               <a:t>D1</a:t>
             </a:r>
           </a:p>
           <a:p>
             <a:pPr algn="ctr"/>
             <a:r>
-              <a:rPr lang="en-US" dirty="0"/>
+              <a:rPr lang="fr-FR" noProof="0" dirty="0"/>
               <a:t>D2</a:t>
             </a:r>
           </a:p>
           <a:p>
             <a:pPr algn="ctr"/>
             <a:r>
-              <a:rPr lang="en-US" dirty="0"/>
+              <a:rPr lang="fr-FR" noProof="0" dirty="0"/>
               <a:t>D3</a:t>
             </a:r>
-            <a:endParaRPr lang="fr-CA" dirty="0"/>
           </a:p>
         </p:txBody>
       </p:sp>
@@ -6971,7 +6646,7 @@
 </p:sld>
 </file>
 
-<file path=ppt/slides/slide5.xml><?xml version="1.0" encoding="utf-8"?>
+<file path=ppt/slides/slide4.xml><?xml version="1.0" encoding="utf-8"?>
 <p:sld xmlns:a="http://schemas.openxmlformats.org/drawingml/2006/main" xmlns:r="http://schemas.openxmlformats.org/officeDocument/2006/relationships" xmlns:p="http://schemas.openxmlformats.org/presentationml/2006/main">
   <p:cSld>
     <p:spTree>
@@ -7058,13 +6733,8 @@
             <a:pPr algn="ctr"/>
             <a:r>
               <a:rPr lang="fr-FR" sz="5400" b="1" noProof="0" dirty="0"/>
-              <a:t>Raid </a:t>
-            </a:r>
-            <a:r>
-              <a:rPr lang="fr-FR" sz="5400" b="1" dirty="0"/>
-              <a:t>5</a:t>
-            </a:r>
-            <a:endParaRPr lang="fr-FR" sz="5400" b="1" noProof="0" dirty="0"/>
+              <a:t>Raid 5</a:t>
+            </a:r>
           </a:p>
         </p:txBody>
       </p:sp>
@@ -7090,7 +6760,7 @@
           <a:lstStyle/>
           <a:p>
             <a:r>
-              <a:rPr lang="fr-FR" dirty="0"/>
+              <a:rPr lang="fr-FR" noProof="0" dirty="0"/>
               <a:t>Un peu plus d’espaces moyennant plus d’opérations pour calculer les parités.</a:t>
             </a:r>
           </a:p>
@@ -7099,20 +6769,26 @@
           </a:p>
           <a:p>
             <a:r>
-              <a:rPr lang="fr-FR" dirty="0"/>
-              <a:t>Les mêmes données sont générées sur les différents disques</a:t>
-            </a:r>
-          </a:p>
-          <a:p>
-            <a:pPr marL="0" indent="0">
-              <a:buNone/>
-            </a:pPr>
-            <a:endParaRPr lang="fr-FR" noProof="0" dirty="0"/>
-          </a:p>
-          <a:p>
-            <a:r>
               <a:rPr lang="fr-FR" noProof="0" dirty="0"/>
-              <a:t>Données (D) et parités (P) réparties :</a:t>
+              <a:t>Des données en « backup » sont enregistré dans chaque disque et les données sont réparties dans les différents disques (comme dans RAID 0)</a:t>
+            </a:r>
+          </a:p>
+          <a:p>
+            <a:r>
+              <a:rPr lang="fr-FR" noProof="0" dirty="0"/>
+              <a:t>Données (D) et </a:t>
+            </a:r>
+            <a:r>
+              <a:rPr lang="fr-FR" noProof="0" dirty="0">
+                <a:solidFill>
+                  <a:srgbClr val="FF0000"/>
+                </a:solidFill>
+              </a:rPr>
+              <a:t>parités (P) </a:t>
+            </a:r>
+            <a:r>
+              <a:rPr lang="fr-FR" noProof="0" dirty="0"/>
+              <a:t>réparties :</a:t>
             </a:r>
           </a:p>
         </p:txBody>
@@ -7146,29 +6822,12 @@
           <a:lstStyle/>
           <a:p>
             <a:r>
-              <a:rPr lang="fr-FR" sz="1400" b="1" dirty="0"/>
+              <a:rPr lang="fr-FR" sz="1400" b="1" noProof="0" dirty="0"/>
               <a:t>Sécurité : </a:t>
             </a:r>
             <a:r>
-              <a:rPr lang="fr-FR" sz="1400" dirty="0"/>
-              <a:t>Peut survivre les pannes si 1 disque en vie</a:t>
-            </a:r>
-            <a:r>
               <a:rPr lang="fr-FR" sz="1400" noProof="0" dirty="0"/>
-              <a:t> 		</a:t>
-            </a:r>
-          </a:p>
-          <a:p>
-            <a:endParaRPr lang="fr-FR" sz="1400" dirty="0"/>
-          </a:p>
-          <a:p>
-            <a:r>
-              <a:rPr lang="fr-FR" sz="1400" b="1" dirty="0"/>
-              <a:t>Pour 2 disques de 2 To : </a:t>
-            </a:r>
-            <a:r>
-              <a:rPr lang="fr-FR" sz="1400" dirty="0"/>
-              <a:t>la capacité est de 2 To</a:t>
+              <a:t>Peut survivre si seulement 1 disque en panne.		</a:t>
             </a:r>
           </a:p>
           <a:p>
@@ -7176,16 +6835,29 @@
           </a:p>
           <a:p>
             <a:r>
-              <a:rPr lang="fr-FR" sz="1400" dirty="0"/>
+              <a:rPr lang="fr-FR" sz="1400" b="1" noProof="0" dirty="0"/>
+              <a:t>Pour 3 disques de 2 To : </a:t>
+            </a:r>
+            <a:r>
+              <a:rPr lang="fr-FR" sz="1400" noProof="0" dirty="0"/>
+              <a:t>la capacité est de 4 To</a:t>
+            </a:r>
+          </a:p>
+          <a:p>
+            <a:endParaRPr lang="fr-FR" sz="1400" noProof="0" dirty="0"/>
+          </a:p>
+          <a:p>
+            <a:r>
+              <a:rPr lang="fr-FR" sz="1400" noProof="0" dirty="0"/>
               <a:t>			</a:t>
             </a:r>
             <a:r>
               <a:rPr lang="fr-FR" sz="1400" b="1" noProof="0" dirty="0"/>
-              <a:t>Minimum disque requis: </a:t>
+              <a:t>Minimum disque requis: 3</a:t>
             </a:r>
             <a:r>
               <a:rPr lang="fr-FR" sz="1400" noProof="0" dirty="0"/>
-              <a:t>2 disques</a:t>
+              <a:t> disques</a:t>
             </a:r>
           </a:p>
         </p:txBody>
@@ -7236,31 +6908,34 @@
           <a:p>
             <a:pPr algn="ctr"/>
             <a:r>
-              <a:rPr lang="en-US" dirty="0"/>
+              <a:rPr lang="fr-FR" noProof="0" dirty="0"/>
               <a:t>Disque B</a:t>
             </a:r>
           </a:p>
           <a:p>
             <a:pPr algn="ctr"/>
             <a:r>
-              <a:rPr lang="en-US" dirty="0"/>
+              <a:rPr lang="fr-FR" noProof="0" dirty="0">
+                <a:solidFill>
+                  <a:srgbClr val="FF0000"/>
+                </a:solidFill>
+              </a:rPr>
               <a:t>P1</a:t>
             </a:r>
           </a:p>
           <a:p>
             <a:pPr algn="ctr"/>
             <a:r>
-              <a:rPr lang="en-US" dirty="0"/>
+              <a:rPr lang="fr-FR" noProof="0" dirty="0"/>
               <a:t>D2</a:t>
             </a:r>
           </a:p>
           <a:p>
             <a:pPr algn="ctr"/>
             <a:r>
-              <a:rPr lang="en-US" dirty="0"/>
-              <a:t>D3</a:t>
-            </a:r>
-            <a:endParaRPr lang="fr-CA" dirty="0"/>
+              <a:rPr lang="fr-FR" noProof="0" dirty="0"/>
+              <a:t>D5</a:t>
+            </a:r>
           </a:p>
         </p:txBody>
       </p:sp>
@@ -7310,31 +6985,34 @@
           <a:p>
             <a:pPr algn="ctr"/>
             <a:r>
-              <a:rPr lang="en-US" dirty="0"/>
+              <a:rPr lang="fr-FR" noProof="0" dirty="0"/>
               <a:t>Disque C</a:t>
             </a:r>
           </a:p>
           <a:p>
             <a:pPr algn="ctr"/>
             <a:r>
-              <a:rPr lang="en-US" dirty="0"/>
-              <a:t>D1</a:t>
+              <a:rPr lang="fr-FR" noProof="0" dirty="0"/>
+              <a:t>D3</a:t>
             </a:r>
           </a:p>
           <a:p>
             <a:pPr algn="ctr"/>
             <a:r>
-              <a:rPr lang="en-US" dirty="0"/>
-              <a:t>D2</a:t>
+              <a:rPr lang="fr-FR" noProof="0" dirty="0"/>
+              <a:t>D6</a:t>
             </a:r>
           </a:p>
           <a:p>
             <a:pPr algn="ctr"/>
             <a:r>
-              <a:rPr lang="en-US" dirty="0"/>
+              <a:rPr lang="fr-FR" noProof="0" dirty="0">
+                <a:solidFill>
+                  <a:srgbClr val="FF0000"/>
+                </a:solidFill>
+              </a:rPr>
               <a:t>P3</a:t>
             </a:r>
-            <a:endParaRPr lang="fr-CA" dirty="0"/>
           </a:p>
         </p:txBody>
       </p:sp>
@@ -7384,31 +7062,34 @@
           <a:p>
             <a:pPr algn="ctr"/>
             <a:r>
-              <a:rPr lang="en-US" dirty="0"/>
+              <a:rPr lang="fr-FR" noProof="0" dirty="0"/>
               <a:t>Disque A</a:t>
             </a:r>
           </a:p>
           <a:p>
             <a:pPr algn="ctr"/>
             <a:r>
-              <a:rPr lang="en-US" dirty="0"/>
+              <a:rPr lang="fr-FR" noProof="0" dirty="0"/>
               <a:t>D1</a:t>
             </a:r>
           </a:p>
           <a:p>
             <a:pPr algn="ctr"/>
             <a:r>
-              <a:rPr lang="en-US" dirty="0"/>
+              <a:rPr lang="fr-FR" noProof="0" dirty="0">
+                <a:solidFill>
+                  <a:srgbClr val="FF0000"/>
+                </a:solidFill>
+              </a:rPr>
               <a:t>P2</a:t>
             </a:r>
           </a:p>
           <a:p>
             <a:pPr algn="ctr"/>
             <a:r>
-              <a:rPr lang="en-US" dirty="0"/>
-              <a:t>D3</a:t>
-            </a:r>
-            <a:endParaRPr lang="fr-CA" dirty="0"/>
+              <a:rPr lang="fr-FR" noProof="0" dirty="0"/>
+              <a:t>D4</a:t>
+            </a:r>
           </a:p>
         </p:txBody>
       </p:sp>
@@ -7425,7 +7106,7 @@
 </p:sld>
 </file>
 
-<file path=ppt/slides/slide6.xml><?xml version="1.0" encoding="utf-8"?>
+<file path=ppt/slides/slide5.xml><?xml version="1.0" encoding="utf-8"?>
 <p:sld xmlns:a="http://schemas.openxmlformats.org/drawingml/2006/main" xmlns:r="http://schemas.openxmlformats.org/officeDocument/2006/relationships" xmlns:p="http://schemas.openxmlformats.org/presentationml/2006/main">
   <p:cSld>
     <p:spTree>
@@ -7433,7 +7114,7 @@
         <p:cNvPr id="1" name="">
           <a:extLst>
             <a:ext uri="{FF2B5EF4-FFF2-40B4-BE49-F238E27FC236}">
-              <a16:creationId xmlns:a16="http://schemas.microsoft.com/office/drawing/2014/main" id="{FB067058-9575-B854-786F-3262E6C8CE21}"/>
+              <a16:creationId xmlns:a16="http://schemas.microsoft.com/office/drawing/2014/main" id="{B4C77847-EC83-6FEE-3942-47F2179E9980}"/>
             </a:ext>
           </a:extLst>
         </p:cNvPr>
@@ -7453,7 +7134,7 @@
           <p:cNvPr id="4" name="Picture 3">
             <a:extLst>
               <a:ext uri="{FF2B5EF4-FFF2-40B4-BE49-F238E27FC236}">
-                <a16:creationId xmlns:a16="http://schemas.microsoft.com/office/drawing/2014/main" id="{A98E68BC-52D5-4AC9-4D8A-9514D5561C32}"/>
+                <a16:creationId xmlns:a16="http://schemas.microsoft.com/office/drawing/2014/main" id="{D09BDD40-AE85-AEB1-9FDB-3315D9CE267F}"/>
               </a:ext>
             </a:extLst>
           </p:cNvPr>
@@ -7486,7 +7167,7 @@
           <p:cNvPr id="2" name="Title 1">
             <a:extLst>
               <a:ext uri="{FF2B5EF4-FFF2-40B4-BE49-F238E27FC236}">
-                <a16:creationId xmlns:a16="http://schemas.microsoft.com/office/drawing/2014/main" id="{AF707F94-050E-EAB5-C84F-9E2067581EC9}"/>
+                <a16:creationId xmlns:a16="http://schemas.microsoft.com/office/drawing/2014/main" id="{D7C08F68-014D-D694-900C-0F368F96FA7E}"/>
               </a:ext>
             </a:extLst>
           </p:cNvPr>
@@ -7512,7 +7193,7 @@
             <a:pPr algn="ctr"/>
             <a:r>
               <a:rPr lang="fr-FR" sz="5400" b="1" noProof="0" dirty="0"/>
-              <a:t>Raid 5</a:t>
+              <a:t>Raid 6</a:t>
             </a:r>
           </a:p>
         </p:txBody>
@@ -7522,7 +7203,7 @@
           <p:cNvPr id="5" name="Content Placeholder 4">
             <a:extLst>
               <a:ext uri="{FF2B5EF4-FFF2-40B4-BE49-F238E27FC236}">
-                <a16:creationId xmlns:a16="http://schemas.microsoft.com/office/drawing/2014/main" id="{5028CE09-D8ED-23FA-438E-513CC378EFC8}"/>
+                <a16:creationId xmlns:a16="http://schemas.microsoft.com/office/drawing/2014/main" id="{44DFED07-6A31-6709-2419-076A6BAF821F}"/>
               </a:ext>
             </a:extLst>
           </p:cNvPr>
@@ -7535,20 +7216,18 @@
         </p:nvSpPr>
         <p:spPr/>
         <p:txBody>
-          <a:bodyPr>
-            <a:normAutofit lnSpcReduction="10000"/>
-          </a:bodyPr>
+          <a:bodyPr/>
           <a:lstStyle/>
           <a:p>
             <a:r>
               <a:rPr lang="fr-FR" noProof="0" dirty="0"/>
-              <a:t>- tolérances : 1 panne</a:t>
+              <a:t>Version très sécurisée de RAID mais nécessite beaucoup de disque et plus de travail pour créer les parités.</a:t>
             </a:r>
           </a:p>
           <a:p>
             <a:r>
               <a:rPr lang="fr-FR" noProof="0" dirty="0"/>
-              <a:t>- capacité = n - 1 x D</a:t>
+              <a:t>les données sont réparties dans les différents disques + 2 blocs de « backup ».</a:t>
             </a:r>
           </a:p>
           <a:p>
@@ -7557,75 +7236,20 @@
           <a:p>
             <a:r>
               <a:rPr lang="fr-FR" noProof="0" dirty="0"/>
-              <a:t>Répartition + une parité distribuée</a:t>
-            </a:r>
-          </a:p>
-          <a:p>
-            <a:endParaRPr lang="fr-FR" noProof="0" dirty="0"/>
-          </a:p>
-          <a:p>
-            <a:r>
-              <a:rPr lang="fr-FR" u="sng" noProof="0" dirty="0"/>
-              <a:t> </a:t>
-            </a:r>
-            <a:r>
-              <a:rPr lang="fr-FR" sz="1400" u="sng" noProof="0" dirty="0"/>
-              <a:t>disque A   disque B   disque C</a:t>
-            </a:r>
-          </a:p>
-          <a:p>
-            <a:r>
-              <a:rPr lang="fr-FR" sz="1400" u="sng" noProof="0" dirty="0"/>
-              <a:t>rangée 1     D1         D2         P1</a:t>
-            </a:r>
-          </a:p>
-          <a:p>
-            <a:r>
-              <a:rPr lang="fr-FR" sz="1400" u="sng" noProof="0" dirty="0"/>
-              <a:t>rangée 2     D3         P2         D4</a:t>
-            </a:r>
-          </a:p>
-          <a:p>
-            <a:r>
-              <a:rPr lang="fr-FR" sz="1400" u="sng" noProof="0" dirty="0"/>
-              <a:t>rangée 3     P3         D5         D6</a:t>
-            </a:r>
-          </a:p>
-          <a:p>
-            <a:r>
-              <a:rPr lang="fr-FR" sz="1400" u="sng" noProof="0" dirty="0"/>
-              <a:t>+++++++</a:t>
-            </a:r>
-          </a:p>
-          <a:p>
-            <a:r>
-              <a:rPr lang="fr-FR" sz="1400" u="sng" noProof="0" dirty="0"/>
-              <a:t> disque A   disque B</a:t>
-            </a:r>
-          </a:p>
-          <a:p>
-            <a:r>
-              <a:rPr lang="fr-FR" sz="1400" u="sng" noProof="0" dirty="0"/>
-              <a:t>bloc 1       A1         A2</a:t>
-            </a:r>
-          </a:p>
-          <a:p>
-            <a:r>
-              <a:rPr lang="fr-FR" sz="1400" u="sng" noProof="0" dirty="0"/>
-              <a:t>bloc 2       A3         A4</a:t>
-            </a:r>
-          </a:p>
-          <a:p>
-            <a:r>
-              <a:rPr lang="fr-FR" sz="1400" u="sng" noProof="0" dirty="0"/>
-              <a:t>bloc 3       A5         A6</a:t>
-            </a:r>
-          </a:p>
-          <a:p>
-            <a:endParaRPr lang="fr-FR" sz="1400" noProof="0" dirty="0"/>
-          </a:p>
-          <a:p>
-            <a:endParaRPr lang="fr-FR" noProof="0" dirty="0"/>
+              <a:t>Données (D) et </a:t>
+            </a:r>
+            <a:r>
+              <a:rPr lang="fr-FR" noProof="0" dirty="0">
+                <a:solidFill>
+                  <a:srgbClr val="FF0000"/>
+                </a:solidFill>
+              </a:rPr>
+              <a:t>parités (P) </a:t>
+            </a:r>
+            <a:r>
+              <a:rPr lang="fr-FR" noProof="0" dirty="0"/>
+              <a:t>réparties :</a:t>
+            </a:r>
           </a:p>
         </p:txBody>
       </p:sp>
@@ -7634,7 +7258,7 @@
           <p:cNvPr id="6" name="Text Placeholder 5">
             <a:extLst>
               <a:ext uri="{FF2B5EF4-FFF2-40B4-BE49-F238E27FC236}">
-                <a16:creationId xmlns:a16="http://schemas.microsoft.com/office/drawing/2014/main" id="{08FAA5C6-57FC-7ADC-5D19-D416EC9DB4B9}"/>
+                <a16:creationId xmlns:a16="http://schemas.microsoft.com/office/drawing/2014/main" id="{BA45F64F-9B6C-9837-15D0-8B87130E9D95}"/>
               </a:ext>
             </a:extLst>
           </p:cNvPr>
@@ -7645,14 +7269,379 @@
             <p:ph type="body" sz="half" idx="2"/>
           </p:nvPr>
         </p:nvSpPr>
-        <p:spPr/>
-        <p:txBody>
-          <a:bodyPr/>
-          <a:lstStyle/>
-          <a:p>
+        <p:spPr>
+          <a:xfrm>
+            <a:off x="689047" y="2427515"/>
+            <a:ext cx="4453846" cy="2209800"/>
+          </a:xfrm>
+        </p:spPr>
+        <p:txBody>
+          <a:bodyPr>
+            <a:noAutofit/>
+          </a:bodyPr>
+          <a:lstStyle/>
+          <a:p>
+            <a:r>
+              <a:rPr lang="fr-FR" sz="1400" b="1" noProof="0" dirty="0"/>
+              <a:t>Sécurité : </a:t>
+            </a:r>
+            <a:r>
+              <a:rPr lang="fr-FR" sz="1400" noProof="0" dirty="0"/>
+              <a:t>Peut survivre jusqu’à deux disques en panne..		</a:t>
+            </a:r>
+          </a:p>
+          <a:p>
+            <a:endParaRPr lang="fr-FR" sz="1400" noProof="0" dirty="0"/>
+          </a:p>
+          <a:p>
+            <a:r>
+              <a:rPr lang="fr-FR" sz="1400" b="1" noProof="0" dirty="0"/>
+              <a:t>Pour 4 disques de 2 To : </a:t>
+            </a:r>
+            <a:r>
+              <a:rPr lang="fr-FR" sz="1400" noProof="0" dirty="0"/>
+              <a:t>la capacité est de 4 To</a:t>
+            </a:r>
+          </a:p>
+          <a:p>
+            <a:endParaRPr lang="fr-FR" sz="1400" noProof="0" dirty="0"/>
+          </a:p>
+          <a:p>
+            <a:r>
+              <a:rPr lang="fr-FR" sz="1400" noProof="0" dirty="0"/>
+              <a:t>			</a:t>
+            </a:r>
+            <a:r>
+              <a:rPr lang="fr-FR" sz="1400" b="1" noProof="0" dirty="0"/>
+              <a:t>Minimum disque requis: 4</a:t>
+            </a:r>
+            <a:r>
+              <a:rPr lang="fr-FR" sz="1400" noProof="0" dirty="0"/>
+              <a:t> disques</a:t>
+            </a:r>
+          </a:p>
+        </p:txBody>
+      </p:sp>
+      <p:sp>
+        <p:nvSpPr>
+          <p:cNvPr id="7" name="Ellipse 6">
+            <a:extLst>
+              <a:ext uri="{FF2B5EF4-FFF2-40B4-BE49-F238E27FC236}">
+                <a16:creationId xmlns:a16="http://schemas.microsoft.com/office/drawing/2014/main" id="{9689F34D-24BC-8D11-1959-05D46B116532}"/>
+              </a:ext>
+            </a:extLst>
+          </p:cNvPr>
+          <p:cNvSpPr/>
+          <p:nvPr/>
+        </p:nvSpPr>
+        <p:spPr>
+          <a:xfrm>
+            <a:off x="6009810" y="4795152"/>
+            <a:ext cx="2804948" cy="1371600"/>
+          </a:xfrm>
+          <a:prstGeom prst="ellipse">
+            <a:avLst/>
+          </a:prstGeom>
+          <a:ln>
+            <a:solidFill>
+              <a:srgbClr val="002060"/>
+            </a:solidFill>
+          </a:ln>
+        </p:spPr>
+        <p:style>
+          <a:lnRef idx="2">
+            <a:schemeClr val="accent6"/>
+          </a:lnRef>
+          <a:fillRef idx="1">
+            <a:schemeClr val="lt1"/>
+          </a:fillRef>
+          <a:effectRef idx="0">
+            <a:schemeClr val="accent6"/>
+          </a:effectRef>
+          <a:fontRef idx="minor">
+            <a:schemeClr val="dk1"/>
+          </a:fontRef>
+        </p:style>
+        <p:txBody>
+          <a:bodyPr rtlCol="0" anchor="ctr"/>
+          <a:lstStyle/>
+          <a:p>
+            <a:pPr algn="ctr"/>
             <a:r>
               <a:rPr lang="fr-FR" noProof="0" dirty="0"/>
-              <a:t>Minimum : 3 disques</a:t>
+              <a:t>Disque C</a:t>
+            </a:r>
+          </a:p>
+          <a:p>
+            <a:pPr algn="ctr"/>
+            <a:r>
+              <a:rPr lang="fr-FR" noProof="0" dirty="0">
+                <a:solidFill>
+                  <a:srgbClr val="FF0000"/>
+                </a:solidFill>
+              </a:rPr>
+              <a:t>P1</a:t>
+            </a:r>
+          </a:p>
+          <a:p>
+            <a:pPr algn="ctr"/>
+            <a:r>
+              <a:rPr lang="fr-FR" noProof="0" dirty="0"/>
+              <a:t>D5</a:t>
+            </a:r>
+          </a:p>
+          <a:p>
+            <a:pPr algn="ctr"/>
+            <a:r>
+              <a:rPr lang="fr-FR" noProof="0" dirty="0">
+                <a:solidFill>
+                  <a:schemeClr val="bg1"/>
+                </a:solidFill>
+              </a:rPr>
+              <a:t>D6</a:t>
+            </a:r>
+          </a:p>
+        </p:txBody>
+      </p:sp>
+      <p:sp>
+        <p:nvSpPr>
+          <p:cNvPr id="9" name="Ellipse 8">
+            <a:extLst>
+              <a:ext uri="{FF2B5EF4-FFF2-40B4-BE49-F238E27FC236}">
+                <a16:creationId xmlns:a16="http://schemas.microsoft.com/office/drawing/2014/main" id="{EEDAA7A9-C4EE-2A80-FC76-801441F57DFD}"/>
+              </a:ext>
+            </a:extLst>
+          </p:cNvPr>
+          <p:cNvSpPr/>
+          <p:nvPr/>
+        </p:nvSpPr>
+        <p:spPr>
+          <a:xfrm>
+            <a:off x="8814758" y="4795152"/>
+            <a:ext cx="2804948" cy="1371600"/>
+          </a:xfrm>
+          <a:prstGeom prst="ellipse">
+            <a:avLst/>
+          </a:prstGeom>
+          <a:ln>
+            <a:solidFill>
+              <a:srgbClr val="002060"/>
+            </a:solidFill>
+          </a:ln>
+        </p:spPr>
+        <p:style>
+          <a:lnRef idx="2">
+            <a:schemeClr val="accent6"/>
+          </a:lnRef>
+          <a:fillRef idx="1">
+            <a:schemeClr val="lt1"/>
+          </a:fillRef>
+          <a:effectRef idx="0">
+            <a:schemeClr val="accent6"/>
+          </a:effectRef>
+          <a:fontRef idx="minor">
+            <a:schemeClr val="dk1"/>
+          </a:fontRef>
+        </p:style>
+        <p:txBody>
+          <a:bodyPr rtlCol="0" anchor="ctr"/>
+          <a:lstStyle/>
+          <a:p>
+            <a:pPr algn="ctr"/>
+            <a:r>
+              <a:rPr lang="fr-FR" noProof="0" dirty="0"/>
+              <a:t>Disque D</a:t>
+            </a:r>
+          </a:p>
+          <a:p>
+            <a:pPr algn="ctr"/>
+            <a:r>
+              <a:rPr lang="fr-FR" noProof="0" dirty="0"/>
+              <a:t>D3</a:t>
+            </a:r>
+          </a:p>
+          <a:p>
+            <a:pPr algn="ctr"/>
+            <a:r>
+              <a:rPr lang="fr-FR" noProof="0" dirty="0">
+                <a:solidFill>
+                  <a:srgbClr val="FF0000"/>
+                </a:solidFill>
+              </a:rPr>
+              <a:t>P3</a:t>
+            </a:r>
+          </a:p>
+          <a:p>
+            <a:pPr algn="ctr"/>
+            <a:r>
+              <a:rPr lang="fr-FR" noProof="0" dirty="0">
+                <a:solidFill>
+                  <a:srgbClr val="FF0000"/>
+                </a:solidFill>
+              </a:rPr>
+              <a:t>P6</a:t>
+            </a:r>
+          </a:p>
+        </p:txBody>
+      </p:sp>
+      <p:sp>
+        <p:nvSpPr>
+          <p:cNvPr id="8" name="Ellipse 7">
+            <a:extLst>
+              <a:ext uri="{FF2B5EF4-FFF2-40B4-BE49-F238E27FC236}">
+                <a16:creationId xmlns:a16="http://schemas.microsoft.com/office/drawing/2014/main" id="{150C009C-DEB9-7667-6B14-36B1B1BD011F}"/>
+              </a:ext>
+            </a:extLst>
+          </p:cNvPr>
+          <p:cNvSpPr/>
+          <p:nvPr/>
+        </p:nvSpPr>
+        <p:spPr>
+          <a:xfrm>
+            <a:off x="399914" y="4771416"/>
+            <a:ext cx="2804948" cy="1371600"/>
+          </a:xfrm>
+          <a:prstGeom prst="ellipse">
+            <a:avLst/>
+          </a:prstGeom>
+          <a:ln>
+            <a:solidFill>
+              <a:srgbClr val="002060"/>
+            </a:solidFill>
+          </a:ln>
+        </p:spPr>
+        <p:style>
+          <a:lnRef idx="2">
+            <a:schemeClr val="accent6"/>
+          </a:lnRef>
+          <a:fillRef idx="1">
+            <a:schemeClr val="lt1"/>
+          </a:fillRef>
+          <a:effectRef idx="0">
+            <a:schemeClr val="accent6"/>
+          </a:effectRef>
+          <a:fontRef idx="minor">
+            <a:schemeClr val="dk1"/>
+          </a:fontRef>
+        </p:style>
+        <p:txBody>
+          <a:bodyPr rtlCol="0" anchor="ctr"/>
+          <a:lstStyle/>
+          <a:p>
+            <a:pPr algn="ctr"/>
+            <a:r>
+              <a:rPr lang="fr-FR" noProof="0" dirty="0"/>
+              <a:t>Disque A</a:t>
+            </a:r>
+          </a:p>
+          <a:p>
+            <a:pPr algn="ctr"/>
+            <a:r>
+              <a:rPr lang="fr-FR" noProof="0" dirty="0"/>
+              <a:t>D1</a:t>
+            </a:r>
+          </a:p>
+          <a:p>
+            <a:pPr algn="ctr"/>
+            <a:r>
+              <a:rPr lang="fr-FR" noProof="0" dirty="0">
+                <a:solidFill>
+                  <a:srgbClr val="FF0000"/>
+                </a:solidFill>
+              </a:rPr>
+              <a:t>P2</a:t>
+            </a:r>
+          </a:p>
+          <a:p>
+            <a:pPr algn="ctr"/>
+            <a:r>
+              <a:rPr lang="fr-FR" noProof="0" dirty="0">
+                <a:solidFill>
+                  <a:srgbClr val="FF0000"/>
+                </a:solidFill>
+              </a:rPr>
+              <a:t>P4</a:t>
+            </a:r>
+          </a:p>
+        </p:txBody>
+      </p:sp>
+      <p:sp>
+        <p:nvSpPr>
+          <p:cNvPr id="10" name="Ellipse 7">
+            <a:extLst>
+              <a:ext uri="{FF2B5EF4-FFF2-40B4-BE49-F238E27FC236}">
+                <a16:creationId xmlns:a16="http://schemas.microsoft.com/office/drawing/2014/main" id="{293B0C10-705F-B7A2-9210-313050340D04}"/>
+              </a:ext>
+            </a:extLst>
+          </p:cNvPr>
+          <p:cNvSpPr/>
+          <p:nvPr/>
+        </p:nvSpPr>
+        <p:spPr>
+          <a:xfrm>
+            <a:off x="3204862" y="4795152"/>
+            <a:ext cx="2804948" cy="1371600"/>
+          </a:xfrm>
+          <a:prstGeom prst="ellipse">
+            <a:avLst/>
+          </a:prstGeom>
+          <a:ln>
+            <a:solidFill>
+              <a:srgbClr val="002060"/>
+            </a:solidFill>
+          </a:ln>
+        </p:spPr>
+        <p:style>
+          <a:lnRef idx="2">
+            <a:schemeClr val="accent6"/>
+          </a:lnRef>
+          <a:fillRef idx="1">
+            <a:schemeClr val="lt1"/>
+          </a:fillRef>
+          <a:effectRef idx="0">
+            <a:schemeClr val="accent6"/>
+          </a:effectRef>
+          <a:fontRef idx="minor">
+            <a:schemeClr val="dk1"/>
+          </a:fontRef>
+        </p:style>
+        <p:txBody>
+          <a:bodyPr rtlCol="0" anchor="ctr"/>
+          <a:lstStyle/>
+          <a:p>
+            <a:pPr algn="ctr"/>
+            <a:r>
+              <a:rPr lang="fr-FR" noProof="0" dirty="0"/>
+              <a:t>Disque B</a:t>
+            </a:r>
+          </a:p>
+          <a:p>
+            <a:pPr algn="ctr"/>
+            <a:r>
+              <a:rPr lang="fr-FR" noProof="0" dirty="0"/>
+              <a:t>D2</a:t>
+            </a:r>
+          </a:p>
+          <a:p>
+            <a:pPr algn="ctr"/>
+            <a:r>
+              <a:rPr lang="fr-FR" noProof="0" dirty="0">
+                <a:solidFill>
+                  <a:schemeClr val="bg1"/>
+                </a:solidFill>
+              </a:rPr>
+              <a:t>D4</a:t>
+            </a:r>
+          </a:p>
+          <a:p>
+            <a:pPr algn="ctr"/>
+            <a:r>
+              <a:rPr lang="fr-FR" noProof="0" dirty="0">
+                <a:solidFill>
+                  <a:srgbClr val="FF0000"/>
+                </a:solidFill>
+              </a:rPr>
+              <a:t>P5</a:t>
             </a:r>
           </a:p>
         </p:txBody>
@@ -7660,7 +7649,7 @@
     </p:spTree>
     <p:extLst>
       <p:ext uri="{BB962C8B-B14F-4D97-AF65-F5344CB8AC3E}">
-        <p14:creationId xmlns:p14="http://schemas.microsoft.com/office/powerpoint/2010/main" val="2211607541"/>
+        <p14:creationId xmlns:p14="http://schemas.microsoft.com/office/powerpoint/2010/main" val="3240651873"/>
       </p:ext>
     </p:extLst>
   </p:cSld>
@@ -7670,7 +7659,7 @@
 </p:sld>
 </file>
 
-<file path=ppt/slides/slide7.xml><?xml version="1.0" encoding="utf-8"?>
+<file path=ppt/slides/slide6.xml><?xml version="1.0" encoding="utf-8"?>
 <p:sld xmlns:a="http://schemas.openxmlformats.org/drawingml/2006/main" xmlns:r="http://schemas.openxmlformats.org/officeDocument/2006/relationships" xmlns:p="http://schemas.openxmlformats.org/presentationml/2006/main">
   <p:cSld>
     <p:spTree>
@@ -7678,7 +7667,7 @@
         <p:cNvPr id="1" name="">
           <a:extLst>
             <a:ext uri="{FF2B5EF4-FFF2-40B4-BE49-F238E27FC236}">
-              <a16:creationId xmlns:a16="http://schemas.microsoft.com/office/drawing/2014/main" id="{651FC7AE-B2F2-4D74-1BB8-0CF16E781542}"/>
+              <a16:creationId xmlns:a16="http://schemas.microsoft.com/office/drawing/2014/main" id="{DDC97F80-1D61-1D38-9096-0CF0B139BF00}"/>
             </a:ext>
           </a:extLst>
         </p:cNvPr>
@@ -7698,7 +7687,7 @@
           <p:cNvPr id="4" name="Picture 3">
             <a:extLst>
               <a:ext uri="{FF2B5EF4-FFF2-40B4-BE49-F238E27FC236}">
-                <a16:creationId xmlns:a16="http://schemas.microsoft.com/office/drawing/2014/main" id="{69A46594-D565-A9D6-6E06-738016FC7D4E}"/>
+                <a16:creationId xmlns:a16="http://schemas.microsoft.com/office/drawing/2014/main" id="{BCA895BE-02CC-82CA-8618-D1DC17140048}"/>
               </a:ext>
             </a:extLst>
           </p:cNvPr>
@@ -7718,7 +7707,7 @@
         </p:blipFill>
         <p:spPr>
           <a:xfrm>
-            <a:off x="21" y="-59431"/>
+            <a:off x="-100564" y="114305"/>
             <a:ext cx="12191979" cy="6857990"/>
           </a:xfrm>
           <a:prstGeom prst="rect">
@@ -7731,7 +7720,7 @@
           <p:cNvPr id="2" name="Title 1">
             <a:extLst>
               <a:ext uri="{FF2B5EF4-FFF2-40B4-BE49-F238E27FC236}">
-                <a16:creationId xmlns:a16="http://schemas.microsoft.com/office/drawing/2014/main" id="{7F8B5B38-AC56-77F2-8047-96F70202694D}"/>
+                <a16:creationId xmlns:a16="http://schemas.microsoft.com/office/drawing/2014/main" id="{048283F3-F4A1-D443-F4F0-59A8A22A8093}"/>
               </a:ext>
             </a:extLst>
           </p:cNvPr>
@@ -7757,7 +7746,7 @@
             <a:pPr algn="ctr"/>
             <a:r>
               <a:rPr lang="fr-FR" sz="5400" b="1" noProof="0" dirty="0"/>
-              <a:t>Raid 6</a:t>
+              <a:t>Raid 10</a:t>
             </a:r>
           </a:p>
         </p:txBody>
@@ -7767,7 +7756,7 @@
           <p:cNvPr id="5" name="Content Placeholder 4">
             <a:extLst>
               <a:ext uri="{FF2B5EF4-FFF2-40B4-BE49-F238E27FC236}">
-                <a16:creationId xmlns:a16="http://schemas.microsoft.com/office/drawing/2014/main" id="{B8C0D097-B33E-31C7-D193-FE70777DFE7D}"/>
+                <a16:creationId xmlns:a16="http://schemas.microsoft.com/office/drawing/2014/main" id="{2BD077FD-B9E0-1290-BBDC-49B09FD5B833}"/>
               </a:ext>
             </a:extLst>
           </p:cNvPr>
@@ -7785,90 +7774,25 @@
           <a:p>
             <a:r>
               <a:rPr lang="fr-FR" noProof="0" dirty="0"/>
-              <a:t>- </a:t>
-            </a:r>
-            <a:r>
-              <a:rPr lang="fr-FR" noProof="0" dirty="0" err="1"/>
-              <a:t>tolerances</a:t>
-            </a:r>
+              <a:t>Version très sécurisée mais nécessite beaucoup de disques. </a:t>
+            </a:r>
+          </a:p>
+          <a:p>
             <a:r>
               <a:rPr lang="fr-FR" noProof="0" dirty="0"/>
-              <a:t> : 2 pannes</a:t>
-            </a:r>
+              <a:t>Données réparties dans des paires de disques qui se copient comme dans RAID 1.</a:t>
+            </a:r>
+          </a:p>
+          <a:p>
+            <a:endParaRPr lang="fr-FR" noProof="0" dirty="0"/>
+          </a:p>
+          <a:p>
+            <a:endParaRPr lang="fr-FR" noProof="0" dirty="0"/>
           </a:p>
           <a:p>
             <a:r>
               <a:rPr lang="fr-FR" noProof="0" dirty="0"/>
-              <a:t>- capacité = (n – 2) x D</a:t>
-            </a:r>
-          </a:p>
-          <a:p>
-            <a:r>
-              <a:rPr lang="fr-FR" noProof="0" dirty="0" err="1"/>
-              <a:t>Repartion</a:t>
-            </a:r>
-            <a:r>
-              <a:rPr lang="fr-FR" noProof="0" dirty="0"/>
-              <a:t> + 2 </a:t>
-            </a:r>
-            <a:r>
-              <a:rPr lang="fr-FR" noProof="0" dirty="0" err="1"/>
-              <a:t>paritées</a:t>
-            </a:r>
-            <a:endParaRPr lang="fr-FR" noProof="0" dirty="0"/>
-          </a:p>
-          <a:p>
-            <a:r>
-              <a:rPr lang="fr-FR" sz="1200" u="sng" noProof="0" dirty="0"/>
-              <a:t> disque A   disque B</a:t>
-            </a:r>
-          </a:p>
-          <a:p>
-            <a:r>
-              <a:rPr lang="fr-FR" sz="1200" u="sng" noProof="0" dirty="0"/>
-              <a:t>bloc 1       A1         A2</a:t>
-            </a:r>
-          </a:p>
-          <a:p>
-            <a:r>
-              <a:rPr lang="fr-FR" sz="1200" u="sng" noProof="0" dirty="0"/>
-              <a:t>bloc 2       A3         A4</a:t>
-            </a:r>
-          </a:p>
-          <a:p>
-            <a:r>
-              <a:rPr lang="fr-FR" sz="1200" u="sng" noProof="0" dirty="0"/>
-              <a:t>bloc 3       A5         A6</a:t>
-            </a:r>
-          </a:p>
-          <a:p>
-            <a:r>
-              <a:rPr lang="fr-FR" sz="1200" u="sng" noProof="0" dirty="0"/>
-              <a:t>++++++  2 fois </a:t>
-            </a:r>
-          </a:p>
-          <a:p>
-            <a:r>
-              <a:rPr lang="fr-FR" sz="1200" u="sng" noProof="0" dirty="0"/>
-              <a:t> disque A   disque B   disque C</a:t>
-            </a:r>
-          </a:p>
-          <a:p>
-            <a:r>
-              <a:rPr lang="fr-FR" sz="1200" u="sng" noProof="0" dirty="0"/>
-              <a:t>rangée 1     D1         D2         P1</a:t>
-            </a:r>
-          </a:p>
-          <a:p>
-            <a:r>
-              <a:rPr lang="fr-FR" sz="1200" u="sng" noProof="0" dirty="0"/>
-              <a:t>rangée 2     D3         P2         D4</a:t>
-            </a:r>
-          </a:p>
-          <a:p>
-            <a:r>
-              <a:rPr lang="fr-FR" sz="1200" u="sng" noProof="0" dirty="0"/>
-              <a:t>rangée 3     P3         D5         D6</a:t>
+              <a:t>Données (D) et parités (P) réparties :</a:t>
             </a:r>
           </a:p>
         </p:txBody>
@@ -7878,7 +7802,7 @@
           <p:cNvPr id="6" name="Text Placeholder 5">
             <a:extLst>
               <a:ext uri="{FF2B5EF4-FFF2-40B4-BE49-F238E27FC236}">
-                <a16:creationId xmlns:a16="http://schemas.microsoft.com/office/drawing/2014/main" id="{4C85A6CB-80ED-6DB8-77DA-91A592FADCF7}"/>
+                <a16:creationId xmlns:a16="http://schemas.microsoft.com/office/drawing/2014/main" id="{05DF9CF4-001A-2A28-05B3-9970AD79FD81}"/>
               </a:ext>
             </a:extLst>
           </p:cNvPr>
@@ -7889,14 +7813,397 @@
             <p:ph type="body" sz="half" idx="2"/>
           </p:nvPr>
         </p:nvSpPr>
-        <p:spPr/>
-        <p:txBody>
-          <a:bodyPr/>
-          <a:lstStyle/>
-          <a:p>
+        <p:spPr>
+          <a:xfrm>
+            <a:off x="689047" y="2427515"/>
+            <a:ext cx="4453846" cy="2209800"/>
+          </a:xfrm>
+        </p:spPr>
+        <p:txBody>
+          <a:bodyPr>
+            <a:noAutofit/>
+          </a:bodyPr>
+          <a:lstStyle/>
+          <a:p>
+            <a:r>
+              <a:rPr lang="fr-FR" sz="1400" b="1" noProof="0" dirty="0"/>
+              <a:t>Sécurité : </a:t>
+            </a:r>
+            <a:r>
+              <a:rPr lang="fr-FR" sz="1400" noProof="0" dirty="0"/>
+              <a:t>Peut survivre aux pannes si paires de miroirs différentes sont touchées. </a:t>
+            </a:r>
+          </a:p>
+          <a:p>
+            <a:endParaRPr lang="fr-FR" sz="1400" noProof="0" dirty="0"/>
+          </a:p>
+          <a:p>
+            <a:r>
+              <a:rPr lang="fr-FR" sz="1400" b="1" noProof="0" dirty="0"/>
+              <a:t>Pour 4 disques de 2 To : </a:t>
+            </a:r>
+            <a:r>
+              <a:rPr lang="fr-FR" sz="1400" noProof="0" dirty="0"/>
+              <a:t>la capacité est de 4 To</a:t>
+            </a:r>
+          </a:p>
+          <a:p>
+            <a:endParaRPr lang="fr-FR" sz="1400" noProof="0" dirty="0"/>
+          </a:p>
+          <a:p>
+            <a:r>
+              <a:rPr lang="fr-FR" sz="1400" noProof="0" dirty="0"/>
+              <a:t>			</a:t>
+            </a:r>
+            <a:r>
+              <a:rPr lang="fr-FR" sz="1400" b="1" noProof="0" dirty="0"/>
+              <a:t>Minimum disque requis: 4</a:t>
+            </a:r>
+            <a:r>
+              <a:rPr lang="fr-FR" sz="1400" noProof="0" dirty="0"/>
+              <a:t> disques </a:t>
+            </a:r>
+          </a:p>
+          <a:p>
+            <a:r>
+              <a:rPr lang="fr-FR" sz="1400" noProof="0" dirty="0"/>
+              <a:t>					+ nombre doit être paire</a:t>
+            </a:r>
+          </a:p>
+        </p:txBody>
+      </p:sp>
+      <p:sp>
+        <p:nvSpPr>
+          <p:cNvPr id="7" name="Ellipse 6">
+            <a:extLst>
+              <a:ext uri="{FF2B5EF4-FFF2-40B4-BE49-F238E27FC236}">
+                <a16:creationId xmlns:a16="http://schemas.microsoft.com/office/drawing/2014/main" id="{90ECD599-9518-3EDF-75DE-408A998F658D}"/>
+              </a:ext>
+            </a:extLst>
+          </p:cNvPr>
+          <p:cNvSpPr/>
+          <p:nvPr/>
+        </p:nvSpPr>
+        <p:spPr>
+          <a:xfrm>
+            <a:off x="2957861" y="4795152"/>
+            <a:ext cx="2804948" cy="1371600"/>
+          </a:xfrm>
+          <a:prstGeom prst="ellipse">
+            <a:avLst/>
+          </a:prstGeom>
+          <a:ln>
+            <a:solidFill>
+              <a:srgbClr val="002060"/>
+            </a:solidFill>
+          </a:ln>
+        </p:spPr>
+        <p:style>
+          <a:lnRef idx="2">
+            <a:schemeClr val="accent6"/>
+          </a:lnRef>
+          <a:fillRef idx="1">
+            <a:schemeClr val="lt1"/>
+          </a:fillRef>
+          <a:effectRef idx="0">
+            <a:schemeClr val="accent6"/>
+          </a:effectRef>
+          <a:fontRef idx="minor">
+            <a:schemeClr val="dk1"/>
+          </a:fontRef>
+        </p:style>
+        <p:txBody>
+          <a:bodyPr rtlCol="0" anchor="ctr"/>
+          <a:lstStyle/>
+          <a:p>
+            <a:pPr algn="ctr"/>
             <a:r>
               <a:rPr lang="fr-FR" noProof="0" dirty="0"/>
-              <a:t>Minimum : 4 disques</a:t>
+              <a:t>Disque B</a:t>
+            </a:r>
+          </a:p>
+          <a:p>
+            <a:pPr algn="ctr"/>
+            <a:r>
+              <a:rPr lang="fr-FR" noProof="0" dirty="0">
+                <a:solidFill>
+                  <a:schemeClr val="bg1"/>
+                </a:solidFill>
+              </a:rPr>
+              <a:t>D1</a:t>
+            </a:r>
+          </a:p>
+          <a:p>
+            <a:pPr algn="ctr"/>
+            <a:r>
+              <a:rPr lang="fr-FR" noProof="0" dirty="0">
+                <a:solidFill>
+                  <a:schemeClr val="bg1"/>
+                </a:solidFill>
+              </a:rPr>
+              <a:t>D3</a:t>
+            </a:r>
+          </a:p>
+          <a:p>
+            <a:pPr algn="ctr"/>
+            <a:r>
+              <a:rPr lang="fr-FR" noProof="0" dirty="0">
+                <a:solidFill>
+                  <a:schemeClr val="bg1"/>
+                </a:solidFill>
+              </a:rPr>
+              <a:t>D5</a:t>
+            </a:r>
+          </a:p>
+        </p:txBody>
+      </p:sp>
+      <p:sp>
+        <p:nvSpPr>
+          <p:cNvPr id="9" name="Ellipse 8">
+            <a:extLst>
+              <a:ext uri="{FF2B5EF4-FFF2-40B4-BE49-F238E27FC236}">
+                <a16:creationId xmlns:a16="http://schemas.microsoft.com/office/drawing/2014/main" id="{F2BBECAA-D0C3-5384-F5C8-5C2F03777A63}"/>
+              </a:ext>
+            </a:extLst>
+          </p:cNvPr>
+          <p:cNvSpPr/>
+          <p:nvPr/>
+        </p:nvSpPr>
+        <p:spPr>
+          <a:xfrm>
+            <a:off x="5762809" y="4795152"/>
+            <a:ext cx="2804948" cy="1371600"/>
+          </a:xfrm>
+          <a:prstGeom prst="ellipse">
+            <a:avLst/>
+          </a:prstGeom>
+          <a:ln>
+            <a:solidFill>
+              <a:srgbClr val="002060"/>
+            </a:solidFill>
+          </a:ln>
+        </p:spPr>
+        <p:style>
+          <a:lnRef idx="2">
+            <a:schemeClr val="accent6"/>
+          </a:lnRef>
+          <a:fillRef idx="1">
+            <a:schemeClr val="lt1"/>
+          </a:fillRef>
+          <a:effectRef idx="0">
+            <a:schemeClr val="accent6"/>
+          </a:effectRef>
+          <a:fontRef idx="minor">
+            <a:schemeClr val="dk1"/>
+          </a:fontRef>
+        </p:style>
+        <p:txBody>
+          <a:bodyPr rtlCol="0" anchor="ctr"/>
+          <a:lstStyle/>
+          <a:p>
+            <a:pPr algn="ctr"/>
+            <a:r>
+              <a:rPr lang="fr-FR" noProof="0" dirty="0"/>
+              <a:t>Disque C</a:t>
+            </a:r>
+          </a:p>
+          <a:p>
+            <a:pPr algn="ctr"/>
+            <a:r>
+              <a:rPr lang="fr-FR" noProof="0" dirty="0"/>
+              <a:t>D2</a:t>
+            </a:r>
+          </a:p>
+          <a:p>
+            <a:pPr algn="ctr"/>
+            <a:r>
+              <a:rPr lang="fr-FR" noProof="0" dirty="0">
+                <a:solidFill>
+                  <a:schemeClr val="bg1"/>
+                </a:solidFill>
+              </a:rPr>
+              <a:t>D4</a:t>
+            </a:r>
+          </a:p>
+          <a:p>
+            <a:pPr algn="ctr"/>
+            <a:r>
+              <a:rPr lang="fr-FR" noProof="0" dirty="0">
+                <a:solidFill>
+                  <a:schemeClr val="bg1"/>
+                </a:solidFill>
+              </a:rPr>
+              <a:t>D6</a:t>
+            </a:r>
+          </a:p>
+        </p:txBody>
+      </p:sp>
+      <p:sp>
+        <p:nvSpPr>
+          <p:cNvPr id="8" name="Ellipse 7">
+            <a:extLst>
+              <a:ext uri="{FF2B5EF4-FFF2-40B4-BE49-F238E27FC236}">
+                <a16:creationId xmlns:a16="http://schemas.microsoft.com/office/drawing/2014/main" id="{7DF9F888-3059-D56D-EAAA-BD120DFA2E6B}"/>
+              </a:ext>
+            </a:extLst>
+          </p:cNvPr>
+          <p:cNvSpPr/>
+          <p:nvPr/>
+        </p:nvSpPr>
+        <p:spPr>
+          <a:xfrm>
+            <a:off x="8567757" y="4795152"/>
+            <a:ext cx="2804948" cy="1371600"/>
+          </a:xfrm>
+          <a:prstGeom prst="ellipse">
+            <a:avLst/>
+          </a:prstGeom>
+          <a:ln>
+            <a:solidFill>
+              <a:srgbClr val="002060"/>
+            </a:solidFill>
+          </a:ln>
+        </p:spPr>
+        <p:style>
+          <a:lnRef idx="2">
+            <a:schemeClr val="accent6"/>
+          </a:lnRef>
+          <a:fillRef idx="1">
+            <a:schemeClr val="lt1"/>
+          </a:fillRef>
+          <a:effectRef idx="0">
+            <a:schemeClr val="accent6"/>
+          </a:effectRef>
+          <a:fontRef idx="minor">
+            <a:schemeClr val="dk1"/>
+          </a:fontRef>
+        </p:style>
+        <p:txBody>
+          <a:bodyPr rtlCol="0" anchor="ctr"/>
+          <a:lstStyle/>
+          <a:p>
+            <a:pPr algn="ctr"/>
+            <a:r>
+              <a:rPr lang="fr-FR" noProof="0" dirty="0"/>
+              <a:t>Disque D</a:t>
+            </a:r>
+          </a:p>
+          <a:p>
+            <a:pPr algn="ctr"/>
+            <a:r>
+              <a:rPr lang="fr-FR" noProof="0" dirty="0">
+                <a:solidFill>
+                  <a:schemeClr val="bg1"/>
+                </a:solidFill>
+              </a:rPr>
+              <a:t>D2</a:t>
+            </a:r>
+          </a:p>
+          <a:p>
+            <a:pPr algn="ctr"/>
+            <a:r>
+              <a:rPr lang="fr-FR" noProof="0" dirty="0">
+                <a:solidFill>
+                  <a:schemeClr val="bg1"/>
+                </a:solidFill>
+              </a:rPr>
+              <a:t>D4</a:t>
+            </a:r>
+          </a:p>
+          <a:p>
+            <a:pPr algn="ctr"/>
+            <a:r>
+              <a:rPr lang="fr-FR" noProof="0" dirty="0">
+                <a:solidFill>
+                  <a:schemeClr val="bg1"/>
+                </a:solidFill>
+              </a:rPr>
+              <a:t>D6</a:t>
+            </a:r>
+          </a:p>
+        </p:txBody>
+      </p:sp>
+      <p:sp>
+        <p:nvSpPr>
+          <p:cNvPr id="10" name="Ellipse 7">
+            <a:extLst>
+              <a:ext uri="{FF2B5EF4-FFF2-40B4-BE49-F238E27FC236}">
+                <a16:creationId xmlns:a16="http://schemas.microsoft.com/office/drawing/2014/main" id="{36FC06E0-CF84-4147-163A-71AFC3C91423}"/>
+              </a:ext>
+            </a:extLst>
+          </p:cNvPr>
+          <p:cNvSpPr/>
+          <p:nvPr/>
+        </p:nvSpPr>
+        <p:spPr>
+          <a:xfrm>
+            <a:off x="138142" y="4795152"/>
+            <a:ext cx="2804948" cy="1371600"/>
+          </a:xfrm>
+          <a:prstGeom prst="ellipse">
+            <a:avLst/>
+          </a:prstGeom>
+          <a:ln>
+            <a:solidFill>
+              <a:srgbClr val="002060"/>
+            </a:solidFill>
+          </a:ln>
+        </p:spPr>
+        <p:style>
+          <a:lnRef idx="2">
+            <a:schemeClr val="accent6"/>
+          </a:lnRef>
+          <a:fillRef idx="1">
+            <a:schemeClr val="lt1"/>
+          </a:fillRef>
+          <a:effectRef idx="0">
+            <a:schemeClr val="accent6"/>
+          </a:effectRef>
+          <a:fontRef idx="minor">
+            <a:schemeClr val="dk1"/>
+          </a:fontRef>
+        </p:style>
+        <p:txBody>
+          <a:bodyPr rtlCol="0" anchor="ctr"/>
+          <a:lstStyle/>
+          <a:p>
+            <a:pPr algn="ctr"/>
+            <a:r>
+              <a:rPr lang="fr-FR" noProof="0" dirty="0"/>
+              <a:t>Disque A</a:t>
+            </a:r>
+          </a:p>
+          <a:p>
+            <a:pPr algn="ctr"/>
+            <a:r>
+              <a:rPr lang="fr-FR" noProof="0" dirty="0">
+                <a:solidFill>
+                  <a:schemeClr val="bg1"/>
+                </a:solidFill>
+              </a:rPr>
+              <a:t>D1</a:t>
+            </a:r>
+          </a:p>
+          <a:p>
+            <a:pPr algn="ctr"/>
+            <a:r>
+              <a:rPr lang="fr-FR" noProof="0" dirty="0">
+                <a:solidFill>
+                  <a:schemeClr val="bg1"/>
+                </a:solidFill>
+              </a:rPr>
+              <a:t>D3</a:t>
+            </a:r>
+          </a:p>
+          <a:p>
+            <a:pPr algn="ctr"/>
+            <a:r>
+              <a:rPr lang="fr-FR" noProof="0" dirty="0">
+                <a:solidFill>
+                  <a:schemeClr val="bg1"/>
+                </a:solidFill>
+              </a:rPr>
+              <a:t>D5</a:t>
             </a:r>
           </a:p>
         </p:txBody>
@@ -7904,7 +8211,7 @@
     </p:spTree>
     <p:extLst>
       <p:ext uri="{BB962C8B-B14F-4D97-AF65-F5344CB8AC3E}">
-        <p14:creationId xmlns:p14="http://schemas.microsoft.com/office/powerpoint/2010/main" val="3876045712"/>
+        <p14:creationId xmlns:p14="http://schemas.microsoft.com/office/powerpoint/2010/main" val="3337754187"/>
       </p:ext>
     </p:extLst>
   </p:cSld>
@@ -7914,183 +8221,7 @@
 </p:sld>
 </file>
 
-<file path=ppt/slides/slide8.xml><?xml version="1.0" encoding="utf-8"?>
-<p:sld xmlns:a="http://schemas.openxmlformats.org/drawingml/2006/main" xmlns:r="http://schemas.openxmlformats.org/officeDocument/2006/relationships" xmlns:p="http://schemas.openxmlformats.org/presentationml/2006/main">
-  <p:cSld>
-    <p:spTree>
-      <p:nvGrpSpPr>
-        <p:cNvPr id="1" name="">
-          <a:extLst>
-            <a:ext uri="{FF2B5EF4-FFF2-40B4-BE49-F238E27FC236}">
-              <a16:creationId xmlns:a16="http://schemas.microsoft.com/office/drawing/2014/main" id="{2A40395A-6678-86BA-D1EF-D254741B762C}"/>
-            </a:ext>
-          </a:extLst>
-        </p:cNvPr>
-        <p:cNvGrpSpPr/>
-        <p:nvPr/>
-      </p:nvGrpSpPr>
-      <p:grpSpPr>
-        <a:xfrm>
-          <a:off x="0" y="0"/>
-          <a:ext cx="0" cy="0"/>
-          <a:chOff x="0" y="0"/>
-          <a:chExt cx="0" cy="0"/>
-        </a:xfrm>
-      </p:grpSpPr>
-      <p:pic>
-        <p:nvPicPr>
-          <p:cNvPr id="4" name="Picture 3">
-            <a:extLst>
-              <a:ext uri="{FF2B5EF4-FFF2-40B4-BE49-F238E27FC236}">
-                <a16:creationId xmlns:a16="http://schemas.microsoft.com/office/drawing/2014/main" id="{2C40A7B8-DB8A-D700-5D19-7DCD321601B4}"/>
-              </a:ext>
-            </a:extLst>
-          </p:cNvPr>
-          <p:cNvPicPr>
-            <a:picLocks noChangeAspect="1"/>
-          </p:cNvPicPr>
-          <p:nvPr/>
-        </p:nvPicPr>
-        <p:blipFill>
-          <a:blip r:embed="rId2">
-            <a:alphaModFix amt="15000"/>
-          </a:blip>
-          <a:srcRect t="7098" b="2176"/>
-          <a:stretch>
-            <a:fillRect/>
-          </a:stretch>
-        </p:blipFill>
-        <p:spPr>
-          <a:xfrm>
-            <a:off x="20" y="10"/>
-            <a:ext cx="12191979" cy="6857990"/>
-          </a:xfrm>
-          <a:prstGeom prst="rect">
-            <a:avLst/>
-          </a:prstGeom>
-        </p:spPr>
-      </p:pic>
-      <p:sp>
-        <p:nvSpPr>
-          <p:cNvPr id="2" name="Title 1">
-            <a:extLst>
-              <a:ext uri="{FF2B5EF4-FFF2-40B4-BE49-F238E27FC236}">
-                <a16:creationId xmlns:a16="http://schemas.microsoft.com/office/drawing/2014/main" id="{A56ECE21-E937-92F5-8FCD-C9465789672B}"/>
-              </a:ext>
-            </a:extLst>
-          </p:cNvPr>
-          <p:cNvSpPr>
-            <a:spLocks noGrp="1"/>
-          </p:cNvSpPr>
-          <p:nvPr>
-            <p:ph type="title"/>
-          </p:nvPr>
-        </p:nvSpPr>
-        <p:spPr>
-          <a:xfrm>
-            <a:off x="1141410" y="114305"/>
-            <a:ext cx="3549121" cy="1371600"/>
-          </a:xfrm>
-        </p:spPr>
-        <p:txBody>
-          <a:bodyPr>
-            <a:normAutofit/>
-          </a:bodyPr>
-          <a:lstStyle/>
-          <a:p>
-            <a:pPr algn="ctr"/>
-            <a:r>
-              <a:rPr lang="fr-FR" sz="5400" b="1" noProof="0" dirty="0"/>
-              <a:t>Raid 10</a:t>
-            </a:r>
-          </a:p>
-        </p:txBody>
-      </p:sp>
-      <p:sp>
-        <p:nvSpPr>
-          <p:cNvPr id="5" name="Content Placeholder 4">
-            <a:extLst>
-              <a:ext uri="{FF2B5EF4-FFF2-40B4-BE49-F238E27FC236}">
-                <a16:creationId xmlns:a16="http://schemas.microsoft.com/office/drawing/2014/main" id="{48526CF9-A8CF-CA99-8B9D-DBEB255606F5}"/>
-              </a:ext>
-            </a:extLst>
-          </p:cNvPr>
-          <p:cNvSpPr>
-            <a:spLocks noGrp="1"/>
-          </p:cNvSpPr>
-          <p:nvPr>
-            <p:ph idx="1"/>
-          </p:nvPr>
-        </p:nvSpPr>
-        <p:spPr/>
-        <p:txBody>
-          <a:bodyPr/>
-          <a:lstStyle/>
-          <a:p>
-            <a:r>
-              <a:rPr lang="fr-FR" noProof="0" dirty="0"/>
-              <a:t>- tolérances : dépends des paires miroirs touchés.</a:t>
-            </a:r>
-          </a:p>
-          <a:p>
-            <a:r>
-              <a:rPr lang="fr-FR" noProof="0" dirty="0"/>
-              <a:t>- capacité = (n / 2) x D</a:t>
-            </a:r>
-          </a:p>
-          <a:p>
-            <a:endParaRPr lang="fr-FR" noProof="0" dirty="0"/>
-          </a:p>
-          <a:p>
-            <a:r>
-              <a:rPr lang="fr-FR" noProof="0" dirty="0"/>
-              <a:t>Divises les fichiers en 2 disques pour augmenter le nombre de mémoire donnée au processeur en même temps. Si 1 crash, ce n’est pas récupérable</a:t>
-            </a:r>
-          </a:p>
-        </p:txBody>
-      </p:sp>
-      <p:sp>
-        <p:nvSpPr>
-          <p:cNvPr id="6" name="Text Placeholder 5">
-            <a:extLst>
-              <a:ext uri="{FF2B5EF4-FFF2-40B4-BE49-F238E27FC236}">
-                <a16:creationId xmlns:a16="http://schemas.microsoft.com/office/drawing/2014/main" id="{EA40D592-BADA-E4C7-2F56-73B8FBFB814F}"/>
-              </a:ext>
-            </a:extLst>
-          </p:cNvPr>
-          <p:cNvSpPr>
-            <a:spLocks noGrp="1"/>
-          </p:cNvSpPr>
-          <p:nvPr>
-            <p:ph type="body" sz="half" idx="2"/>
-          </p:nvPr>
-        </p:nvSpPr>
-        <p:spPr/>
-        <p:txBody>
-          <a:bodyPr/>
-          <a:lstStyle/>
-          <a:p>
-            <a:r>
-              <a:rPr lang="fr-FR" noProof="0" dirty="0"/>
-              <a:t>Minimum : 4 disques (nombre pair)</a:t>
-            </a:r>
-          </a:p>
-        </p:txBody>
-      </p:sp>
-    </p:spTree>
-    <p:extLst>
-      <p:ext uri="{BB962C8B-B14F-4D97-AF65-F5344CB8AC3E}">
-        <p14:creationId xmlns:p14="http://schemas.microsoft.com/office/powerpoint/2010/main" val="122772299"/>
-      </p:ext>
-    </p:extLst>
-  </p:cSld>
-  <p:clrMapOvr>
-    <a:masterClrMapping/>
-  </p:clrMapOvr>
-</p:sld>
-</file>
-
-<file path=ppt/slides/slide9.xml><?xml version="1.0" encoding="utf-8"?>
+<file path=ppt/slides/slide7.xml><?xml version="1.0" encoding="utf-8"?>
 <p:sld xmlns:a="http://schemas.openxmlformats.org/drawingml/2006/main" xmlns:r="http://schemas.openxmlformats.org/officeDocument/2006/relationships" xmlns:p="http://schemas.openxmlformats.org/presentationml/2006/main">
   <p:cSld>
     <p:spTree>
@@ -8138,7 +8269,7 @@
         </p:blipFill>
         <p:spPr>
           <a:xfrm>
-            <a:off x="20" y="10"/>
+            <a:off x="-1579" y="10"/>
             <a:ext cx="12191979" cy="6857990"/>
           </a:xfrm>
           <a:prstGeom prst="rect">
@@ -8162,15 +8293,10 @@
             <p:ph type="title"/>
           </p:nvPr>
         </p:nvSpPr>
-        <p:spPr>
-          <a:xfrm>
-            <a:off x="1653547" y="228600"/>
-            <a:ext cx="8884906" cy="1371600"/>
-          </a:xfrm>
-        </p:spPr>
+        <p:spPr/>
         <p:txBody>
           <a:bodyPr>
-            <a:normAutofit fontScale="90000"/>
+            <a:normAutofit/>
           </a:bodyPr>
           <a:lstStyle/>
           <a:p>
@@ -8184,10 +8310,10 @@
       </p:sp>
       <p:sp>
         <p:nvSpPr>
-          <p:cNvPr id="5" name="Content Placeholder 4">
+          <p:cNvPr id="3" name="Text Placeholder 2">
             <a:extLst>
               <a:ext uri="{FF2B5EF4-FFF2-40B4-BE49-F238E27FC236}">
-                <a16:creationId xmlns:a16="http://schemas.microsoft.com/office/drawing/2014/main" id="{6F3E5169-84D5-DE83-3226-EAF70133012C}"/>
+                <a16:creationId xmlns:a16="http://schemas.microsoft.com/office/drawing/2014/main" id="{F7211848-FC5A-DFBB-A284-7CCC7DDC18A3}"/>
               </a:ext>
             </a:extLst>
           </p:cNvPr>
@@ -8195,61 +8321,70 @@
             <a:spLocks noGrp="1"/>
           </p:cNvSpPr>
           <p:nvPr>
-            <p:ph idx="1"/>
-          </p:nvPr>
-        </p:nvSpPr>
-        <p:spPr/>
+            <p:ph type="body" idx="1"/>
+          </p:nvPr>
+        </p:nvSpPr>
+        <p:spPr>
+          <a:xfrm>
+            <a:off x="1059114" y="3124200"/>
+            <a:ext cx="10233725" cy="2828544"/>
+          </a:xfrm>
+        </p:spPr>
         <p:txBody>
           <a:bodyPr/>
           <a:lstStyle/>
           <a:p>
             <a:r>
+              <a:rPr lang="fr-FR" dirty="0"/>
+              <a:t>-	</a:t>
+            </a:r>
+            <a:r>
               <a:rPr lang="fr-FR" noProof="0" dirty="0"/>
-              <a:t>Pourquoi cela ne remplace pas une sauvegarde</a:t>
-            </a:r>
-          </a:p>
-          <a:p>
-            <a:endParaRPr lang="fr-FR" dirty="0"/>
-          </a:p>
-          <a:p>
+              <a:t>RAID </a:t>
+            </a:r>
+            <a:r>
+              <a:rPr lang="fr-FR" noProof="0" dirty="0">
+                <a:solidFill>
+                  <a:srgbClr val="00B050"/>
+                </a:solidFill>
+              </a:rPr>
+              <a:t>permet</a:t>
+            </a:r>
             <a:r>
               <a:rPr lang="fr-FR" noProof="0" dirty="0"/>
-              <a:t>1 exemple ou RAID aide </a:t>
-            </a:r>
-          </a:p>
-          <a:p>
-            <a:r>
-              <a:rPr lang="fr-FR" dirty="0"/>
-              <a:t>1 exemple ou RAID n’est pas suffisant.</a:t>
-            </a:r>
+              <a:t> de reconstruire des données localement lorsqu’une panne surgit. SI un disque subit une panne mécanique, RAID peut reconstruire en mode DÉGRADÉ. </a:t>
+            </a:r>
+          </a:p>
+          <a:p>
+            <a:pPr marL="342900" indent="-342900">
+              <a:buFontTx/>
+              <a:buChar char="-"/>
+            </a:pPr>
             <a:endParaRPr lang="fr-FR" noProof="0" dirty="0"/>
           </a:p>
-        </p:txBody>
-      </p:sp>
-      <p:sp>
-        <p:nvSpPr>
-          <p:cNvPr id="6" name="Text Placeholder 5">
-            <a:extLst>
-              <a:ext uri="{FF2B5EF4-FFF2-40B4-BE49-F238E27FC236}">
-                <a16:creationId xmlns:a16="http://schemas.microsoft.com/office/drawing/2014/main" id="{E9854642-BC77-97DF-8A66-2F1B0B2EE474}"/>
-              </a:ext>
-            </a:extLst>
-          </p:cNvPr>
-          <p:cNvSpPr>
-            <a:spLocks noGrp="1"/>
-          </p:cNvSpPr>
-          <p:nvPr>
-            <p:ph type="body" sz="half" idx="2"/>
-          </p:nvPr>
-        </p:nvSpPr>
-        <p:spPr/>
-        <p:txBody>
-          <a:bodyPr/>
-          <a:lstStyle/>
+          <a:p>
+            <a:pPr marL="342900" indent="-342900">
+              <a:buFontTx/>
+              <a:buChar char="-"/>
+            </a:pPr>
+            <a:endParaRPr lang="fr-FR" noProof="0" dirty="0"/>
+          </a:p>
           <a:p>
             <a:r>
               <a:rPr lang="fr-FR" noProof="0" dirty="0"/>
-              <a:t>Minimum : 4 disques (nombre pair)</a:t>
+              <a:t>-	RAID </a:t>
+            </a:r>
+            <a:r>
+              <a:rPr lang="fr-FR" noProof="0" dirty="0">
+                <a:solidFill>
+                  <a:srgbClr val="FF0000"/>
+                </a:solidFill>
+              </a:rPr>
+              <a:t>ne permet pas </a:t>
+            </a:r>
+            <a:r>
+              <a:rPr lang="fr-FR" noProof="0" dirty="0"/>
+              <a:t>de rétablir une version antérieure. Si des données sont effacées ou écrasés, ils sont irrécupérables.</a:t>
             </a:r>
           </a:p>
         </p:txBody>
